--- a/examples/editorial-story/story.pptx
+++ b/examples/editorial-story/story.pptx
@@ -1106,12 +1106,17 @@
           </a:p>
           <a:p>
             <a:r>
+              <a:t>  "row_alignments": {},</a:t>
+            </a:r>
+          </a:p>
+          <a:p>
+            <a:r>
               <a:t>  "images": {},</a:t>
             </a:r>
           </a:p>
           <a:p>
             <a:r>
-              <a:t>  "template_sha256": "373871de87754b38c8f1fed072a644fd9d624823fd0ac5a4753f6e04247dd2ff"</a:t>
+              <a:t>  "template_sha256": "ff0a4781bb1465467ac9ed96880843f7e2b10f8c90722b4befbca4838a610a1b"</a:t>
             </a:r>
           </a:p>
           <a:p>
@@ -1776,12 +1781,17 @@
           </a:p>
           <a:p>
             <a:r>
+              <a:t>  "row_alignments": {},</a:t>
+            </a:r>
+          </a:p>
+          <a:p>
+            <a:r>
               <a:t>  "images": {},</a:t>
             </a:r>
           </a:p>
           <a:p>
             <a:r>
-              <a:t>  "template_sha256": "3286fa674d23aeed50881559e544d5a2fe34d674679a770437c90da3b344a932"</a:t>
+              <a:t>  "template_sha256": "4b5ef2716380c3f9aeb4e3948ce5712dae81972488b013155825ed3d02733dfa"</a:t>
             </a:r>
           </a:p>
           <a:p>
@@ -2496,12 +2506,17 @@
           </a:p>
           <a:p>
             <a:r>
+              <a:t>  "row_alignments": {},</a:t>
+            </a:r>
+          </a:p>
+          <a:p>
+            <a:r>
               <a:t>  "images": {},</a:t>
             </a:r>
           </a:p>
           <a:p>
             <a:r>
-              <a:t>  "template_sha256": "d36e783ada6fa92d92adafb25b9a915f03f28ac61ac97072f711affc95ec1c6c"</a:t>
+              <a:t>  "template_sha256": "657341263111a6fa5c82603769ef3055f5682ed447e71b5eb6cac8d220c094e3"</a:t>
             </a:r>
           </a:p>
           <a:p>
@@ -3346,12 +3361,17 @@
           </a:p>
           <a:p>
             <a:r>
+              <a:t>  "row_alignments": {},</a:t>
+            </a:r>
+          </a:p>
+          <a:p>
+            <a:r>
               <a:t>  "images": {},</a:t>
             </a:r>
           </a:p>
           <a:p>
             <a:r>
-              <a:t>  "template_sha256": "8eaf948781dead9554a62e3ac491faba9cb93dc833fd60ddb4615a3e302e4e72"</a:t>
+              <a:t>  "template_sha256": "5abf4bc00f09927d248be6792b2823517de33cd34c4cabba7b54cbc5ae122823"</a:t>
             </a:r>
           </a:p>
           <a:p>
@@ -4416,12 +4436,17 @@
           </a:p>
           <a:p>
             <a:r>
+              <a:t>  "row_alignments": {},</a:t>
+            </a:r>
+          </a:p>
+          <a:p>
+            <a:r>
               <a:t>  "images": {},</a:t>
             </a:r>
           </a:p>
           <a:p>
             <a:r>
-              <a:t>  "template_sha256": "f23fbba0be512b40285904d25dfa2e0f7155bbb5e7d7a4a059e6fdff5e255115"</a:t>
+              <a:t>  "template_sha256": "6b143d7815acfd4ae1cbf24a7c95d46d64b789567061c6ba384bff91be84f4db"</a:t>
             </a:r>
           </a:p>
           <a:p>
@@ -5266,12 +5291,17 @@
           </a:p>
           <a:p>
             <a:r>
+              <a:t>  "row_alignments": {},</a:t>
+            </a:r>
+          </a:p>
+          <a:p>
+            <a:r>
               <a:t>  "images": {},</a:t>
             </a:r>
           </a:p>
           <a:p>
             <a:r>
-              <a:t>  "template_sha256": "530a185bdab5632a7ec4ff7b7b649f8235abff8fa5c07f4379c49ef3e34c9817"</a:t>
+              <a:t>  "template_sha256": "8ee82b12631edff443641c06f1c61b4722180f84e6596036bca7b43cd14885ac"</a:t>
             </a:r>
           </a:p>
           <a:p>
@@ -5736,12 +5766,17 @@
           </a:p>
           <a:p>
             <a:r>
+              <a:t>  "row_alignments": {},</a:t>
+            </a:r>
+          </a:p>
+          <a:p>
+            <a:r>
               <a:t>  "images": {},</a:t>
             </a:r>
           </a:p>
           <a:p>
             <a:r>
-              <a:t>  "template_sha256": "342f31eaf4b7caf5d689ac515cabb33f95177a8673bafc1dd8ec53c1fe9a7f48"</a:t>
+              <a:t>  "template_sha256": "fc7c7608701a9f51f830cb358052650bad6e57c7295f6afbc3f0be1c10e8e18e"</a:t>
             </a:r>
           </a:p>
           <a:p>
@@ -6306,12 +6341,17 @@
           </a:p>
           <a:p>
             <a:r>
+              <a:t>  "row_alignments": {},</a:t>
+            </a:r>
+          </a:p>
+          <a:p>
+            <a:r>
               <a:t>  "images": {},</a:t>
             </a:r>
           </a:p>
           <a:p>
             <a:r>
-              <a:t>  "template_sha256": "7d6b70bfcec2bd3905c96b67a4654daafbd829e1a14f5fec3af1673d13f432d5"</a:t>
+              <a:t>  "template_sha256": "f5c0a412e977df14e76b0050ac94ed1081aaf8b2e527a6145d9f50c9bc94de5d"</a:t>
             </a:r>
           </a:p>
           <a:p>
@@ -6876,12 +6916,17 @@
           </a:p>
           <a:p>
             <a:r>
+              <a:t>  "row_alignments": {},</a:t>
+            </a:r>
+          </a:p>
+          <a:p>
+            <a:r>
               <a:t>  "images": {},</a:t>
             </a:r>
           </a:p>
           <a:p>
             <a:r>
-              <a:t>  "template_sha256": "8e337753ccc108256a381c283a3942066fe7b5c6edb1219bfbe5d9f667d19b36"</a:t>
+              <a:t>  "template_sha256": "91ad7e5631c2cbfbe3502bea735ef682aa258a63812c564f8f8b418b642af5ba"</a:t>
             </a:r>
           </a:p>
           <a:p>
@@ -7596,12 +7641,17 @@
           </a:p>
           <a:p>
             <a:r>
+              <a:t>  "row_alignments": {},</a:t>
+            </a:r>
+          </a:p>
+          <a:p>
+            <a:r>
               <a:t>  "images": {},</a:t>
             </a:r>
           </a:p>
           <a:p>
             <a:r>
-              <a:t>  "template_sha256": "d84dc9a9af4e114daf074a82c3dc7112852bcfcf402cd8851b2a5427b4d56685"</a:t>
+              <a:t>  "template_sha256": "2bc7cd165bc5384dd2c1271100088da12a7ad76866cd16b07bf48b219f176c6a"</a:t>
             </a:r>
           </a:p>
           <a:p>
@@ -8316,12 +8366,17 @@
           </a:p>
           <a:p>
             <a:r>
+              <a:t>  "row_alignments": {},</a:t>
+            </a:r>
+          </a:p>
+          <a:p>
+            <a:r>
               <a:t>  "images": {},</a:t>
             </a:r>
           </a:p>
           <a:p>
             <a:r>
-              <a:t>  "template_sha256": "5cfc34d5aeabb2ee77faf4cc69ad1b47369e98b65dc7d1c8e9122baab7ab45ae"</a:t>
+              <a:t>  "template_sha256": "c9a208653cd601df4fd7d317072f17c738f7aee0e75d980791e7c936ea99b8ab"</a:t>
             </a:r>
           </a:p>
           <a:p>
@@ -9036,12 +9091,17 @@
           </a:p>
           <a:p>
             <a:r>
+              <a:t>  "row_alignments": {},</a:t>
+            </a:r>
+          </a:p>
+          <a:p>
+            <a:r>
               <a:t>  "images": {},</a:t>
             </a:r>
           </a:p>
           <a:p>
             <a:r>
-              <a:t>  "template_sha256": "d84dc9a9af4e114daf074a82c3dc7112852bcfcf402cd8851b2a5427b4d56685"</a:t>
+              <a:t>  "template_sha256": "2bc7cd165bc5384dd2c1271100088da12a7ad76866cd16b07bf48b219f176c6a"</a:t>
             </a:r>
           </a:p>
           <a:p>
@@ -9756,12 +9816,17 @@
           </a:p>
           <a:p>
             <a:r>
+              <a:t>  "row_alignments": {},</a:t>
+            </a:r>
+          </a:p>
+          <a:p>
+            <a:r>
               <a:t>  "images": {},</a:t>
             </a:r>
           </a:p>
           <a:p>
             <a:r>
-              <a:t>  "template_sha256": "5cfc34d5aeabb2ee77faf4cc69ad1b47369e98b65dc7d1c8e9122baab7ab45ae"</a:t>
+              <a:t>  "template_sha256": "c9a208653cd601df4fd7d317072f17c738f7aee0e75d980791e7c936ea99b8ab"</a:t>
             </a:r>
           </a:p>
           <a:p>
@@ -10926,12 +10991,17 @@
           </a:p>
           <a:p>
             <a:r>
+              <a:t>  "row_alignments": {},</a:t>
+            </a:r>
+          </a:p>
+          <a:p>
+            <a:r>
               <a:t>  "images": {},</a:t>
             </a:r>
           </a:p>
           <a:p>
             <a:r>
-              <a:t>  "template_sha256": "9815c7ffea958d535e3532b69a0d70e7b5d6acdeeae91964f3820387b4085d4d"</a:t>
+              <a:t>  "template_sha256": "b21da0482646304af7dae48ef6912a9b6762dc78ed5b7f5e2338eec82a777432"</a:t>
             </a:r>
           </a:p>
           <a:p>
@@ -11646,12 +11716,17 @@
           </a:p>
           <a:p>
             <a:r>
+              <a:t>  "row_alignments": {},</a:t>
+            </a:r>
+          </a:p>
+          <a:p>
+            <a:r>
               <a:t>  "images": {},</a:t>
             </a:r>
           </a:p>
           <a:p>
             <a:r>
-              <a:t>  "template_sha256": "3529bb9757b1f2a155c8665df1f90558fdfb1436345aa5aead4ef9c7e94676f0"</a:t>
+              <a:t>  "template_sha256": "b78fc81f26ab302c659c4dde409ca4f5fce394986bbbf80ba45edd631f1f8f40"</a:t>
             </a:r>
           </a:p>
           <a:p>
@@ -12416,12 +12491,17 @@
           </a:p>
           <a:p>
             <a:r>
+              <a:t>  "row_alignments": {},</a:t>
+            </a:r>
+          </a:p>
+          <a:p>
+            <a:r>
               <a:t>  "images": {},</a:t>
             </a:r>
           </a:p>
           <a:p>
             <a:r>
-              <a:t>  "template_sha256": "1ad1774e3f1fe7f2ea2c7dd8715dbda8108d91d1525b2eb53c86bcfed6113fa1"</a:t>
+              <a:t>  "template_sha256": "5b593446be0d0769f4a209d89011e58496fe0543c2ae3231d84ba3422c0d9b64"</a:t>
             </a:r>
           </a:p>
           <a:p>
@@ -15501,7 +15581,7 @@
           <a:noFill/>
         </p:spPr>
         <p:txBody>
-          <a:bodyPr wrap="square" lIns="18288" rIns="18288" tIns="13716" bIns="13716">
+          <a:bodyPr wrap="square" anchor="t" lIns="18288" rIns="18288" tIns="13716" bIns="13716">
             <a:noAutofit/>
           </a:bodyPr>
           <a:lstStyle/>
@@ -15556,7 +15636,7 @@
           <a:noFill/>
         </p:spPr>
         <p:txBody>
-          <a:bodyPr wrap="square" lIns="18288" rIns="18288" tIns="13716" bIns="13716">
+          <a:bodyPr wrap="square" anchor="t" lIns="18288" rIns="18288" tIns="13716" bIns="13716">
             <a:noAutofit/>
           </a:bodyPr>
           <a:lstStyle/>
@@ -15611,7 +15691,7 @@
           <a:noFill/>
         </p:spPr>
         <p:txBody>
-          <a:bodyPr wrap="square" lIns="18288" rIns="18288" tIns="13716" bIns="13716">
+          <a:bodyPr wrap="square" anchor="t" lIns="18288" rIns="18288" tIns="13716" bIns="13716">
             <a:noAutofit/>
           </a:bodyPr>
           <a:lstStyle/>
@@ -15710,7 +15790,7 @@
           <a:noFill/>
         </p:spPr>
         <p:txBody>
-          <a:bodyPr wrap="square" lIns="18288" rIns="18288" tIns="13716" bIns="13716">
+          <a:bodyPr wrap="square" anchor="t" lIns="18288" rIns="18288" tIns="13716" bIns="13716">
             <a:noAutofit/>
           </a:bodyPr>
           <a:lstStyle/>
@@ -15765,7 +15845,7 @@
           <a:noFill/>
         </p:spPr>
         <p:txBody>
-          <a:bodyPr wrap="square" lIns="18288" rIns="18288" tIns="13716" bIns="13716">
+          <a:bodyPr wrap="square" anchor="t" lIns="18288" rIns="18288" tIns="13716" bIns="13716">
             <a:noAutofit/>
           </a:bodyPr>
           <a:lstStyle/>
@@ -15910,7 +15990,7 @@
           <a:noFill/>
         </p:spPr>
         <p:txBody>
-          <a:bodyPr wrap="square" lIns="18288" rIns="18288" tIns="13716" bIns="13716">
+          <a:bodyPr wrap="square" anchor="t" lIns="18288" rIns="18288" tIns="13716" bIns="13716">
             <a:noAutofit/>
           </a:bodyPr>
           <a:lstStyle/>
@@ -15965,7 +16045,7 @@
           <a:noFill/>
         </p:spPr>
         <p:txBody>
-          <a:bodyPr wrap="square" lIns="18288" rIns="18288" tIns="13716" bIns="13716">
+          <a:bodyPr wrap="square" anchor="t" lIns="18288" rIns="18288" tIns="13716" bIns="13716">
             <a:noAutofit/>
           </a:bodyPr>
           <a:lstStyle/>
@@ -16110,7 +16190,7 @@
           <a:noFill/>
         </p:spPr>
         <p:txBody>
-          <a:bodyPr wrap="square" lIns="18288" rIns="18288" tIns="13716" bIns="13716">
+          <a:bodyPr wrap="square" anchor="t" lIns="18288" rIns="18288" tIns="13716" bIns="13716">
             <a:noAutofit/>
           </a:bodyPr>
           <a:lstStyle/>
@@ -16165,7 +16245,7 @@
           <a:noFill/>
         </p:spPr>
         <p:txBody>
-          <a:bodyPr wrap="square" lIns="18288" rIns="18288" tIns="13716" bIns="13716">
+          <a:bodyPr wrap="square" anchor="t" lIns="18288" rIns="18288" tIns="13716" bIns="13716">
             <a:noAutofit/>
           </a:bodyPr>
           <a:lstStyle/>
@@ -16290,7 +16370,7 @@
           <a:noFill/>
         </p:spPr>
         <p:txBody>
-          <a:bodyPr wrap="square" lIns="18288" rIns="18288" tIns="13716" bIns="13716">
+          <a:bodyPr wrap="square" anchor="t" lIns="18288" rIns="18288" tIns="13716" bIns="13716">
             <a:noAutofit/>
           </a:bodyPr>
           <a:lstStyle/>
@@ -16345,7 +16425,7 @@
           <a:noFill/>
         </p:spPr>
         <p:txBody>
-          <a:bodyPr wrap="square" lIns="18288" rIns="18288" tIns="13716" bIns="13716">
+          <a:bodyPr wrap="square" anchor="t" lIns="18288" rIns="18288" tIns="13716" bIns="13716">
             <a:noAutofit/>
           </a:bodyPr>
           <a:lstStyle/>
@@ -16400,7 +16480,7 @@
           <a:noFill/>
         </p:spPr>
         <p:txBody>
-          <a:bodyPr wrap="square" lIns="18288" rIns="18288" tIns="13716" bIns="13716">
+          <a:bodyPr wrap="square" anchor="t" lIns="18288" rIns="18288" tIns="13716" bIns="13716">
             <a:noAutofit/>
           </a:bodyPr>
           <a:lstStyle/>
@@ -16499,7 +16579,7 @@
           <a:noFill/>
         </p:spPr>
         <p:txBody>
-          <a:bodyPr wrap="square" lIns="18288" rIns="18288" tIns="13716" bIns="13716">
+          <a:bodyPr wrap="square" anchor="t" lIns="18288" rIns="18288" tIns="13716" bIns="13716">
             <a:noAutofit/>
           </a:bodyPr>
           <a:lstStyle/>
@@ -16554,7 +16634,7 @@
           <a:noFill/>
         </p:spPr>
         <p:txBody>
-          <a:bodyPr wrap="square" lIns="18288" rIns="18288" tIns="13716" bIns="13716">
+          <a:bodyPr wrap="square" anchor="t" lIns="18288" rIns="18288" tIns="13716" bIns="13716">
             <a:noAutofit/>
           </a:bodyPr>
           <a:lstStyle/>
@@ -16689,7 +16769,7 @@
         <p:spPr>
           <a:xfrm>
             <a:off x="1234440" y="2167127"/>
-            <a:ext cx="411480" cy="365760"/>
+            <a:ext cx="411480" cy="916686"/>
           </a:xfrm>
           <a:prstGeom prst="rect">
             <a:avLst/>
@@ -16697,7 +16777,7 @@
           <a:noFill/>
         </p:spPr>
         <p:txBody>
-          <a:bodyPr wrap="square" lIns="18288" rIns="18288" tIns="13716" bIns="13716">
+          <a:bodyPr wrap="square" anchor="ctr" lIns="18288" rIns="18288" tIns="13716" bIns="13716">
             <a:noAutofit/>
           </a:bodyPr>
           <a:lstStyle/>
@@ -16743,8 +16823,8 @@
         </p:nvSpPr>
         <p:spPr>
           <a:xfrm>
-            <a:off x="1755648" y="2157984"/>
-            <a:ext cx="2542032" cy="685800"/>
+            <a:off x="1755648" y="2167127"/>
+            <a:ext cx="2542032" cy="916686"/>
           </a:xfrm>
           <a:prstGeom prst="rect">
             <a:avLst/>
@@ -16752,7 +16832,7 @@
           <a:noFill/>
         </p:spPr>
         <p:txBody>
-          <a:bodyPr wrap="square" lIns="18288" rIns="18288" tIns="13716" bIns="13716">
+          <a:bodyPr wrap="square" anchor="ctr" lIns="18288" rIns="18288" tIns="13716" bIns="13716">
             <a:noAutofit/>
           </a:bodyPr>
           <a:lstStyle/>
@@ -16798,8 +16878,8 @@
         </p:nvSpPr>
         <p:spPr>
           <a:xfrm>
-            <a:off x="4507992" y="2157984"/>
-            <a:ext cx="7013448" cy="944118"/>
+            <a:off x="4507992" y="2167127"/>
+            <a:ext cx="7013448" cy="916686"/>
           </a:xfrm>
           <a:prstGeom prst="rect">
             <a:avLst/>
@@ -16807,7 +16887,7 @@
           <a:noFill/>
         </p:spPr>
         <p:txBody>
-          <a:bodyPr wrap="square" lIns="18288" rIns="18288" tIns="13716" bIns="13716">
+          <a:bodyPr wrap="square" anchor="ctr" lIns="18288" rIns="18288" tIns="13716" bIns="13716">
             <a:noAutofit/>
           </a:bodyPr>
           <a:lstStyle/>
@@ -16898,7 +16978,7 @@
         <p:spPr>
           <a:xfrm>
             <a:off x="1234440" y="3138677"/>
-            <a:ext cx="411480" cy="365760"/>
+            <a:ext cx="411480" cy="916686"/>
           </a:xfrm>
           <a:prstGeom prst="rect">
             <a:avLst/>
@@ -16906,7 +16986,7 @@
           <a:noFill/>
         </p:spPr>
         <p:txBody>
-          <a:bodyPr wrap="square" lIns="18288" rIns="18288" tIns="13716" bIns="13716">
+          <a:bodyPr wrap="square" anchor="ctr" lIns="18288" rIns="18288" tIns="13716" bIns="13716">
             <a:noAutofit/>
           </a:bodyPr>
           <a:lstStyle/>
@@ -16952,8 +17032,8 @@
         </p:nvSpPr>
         <p:spPr>
           <a:xfrm>
-            <a:off x="1755648" y="3129534"/>
-            <a:ext cx="2542032" cy="685800"/>
+            <a:off x="1755648" y="3138677"/>
+            <a:ext cx="2542032" cy="916686"/>
           </a:xfrm>
           <a:prstGeom prst="rect">
             <a:avLst/>
@@ -16961,7 +17041,7 @@
           <a:noFill/>
         </p:spPr>
         <p:txBody>
-          <a:bodyPr wrap="square" lIns="18288" rIns="18288" tIns="13716" bIns="13716">
+          <a:bodyPr wrap="square" anchor="ctr" lIns="18288" rIns="18288" tIns="13716" bIns="13716">
             <a:noAutofit/>
           </a:bodyPr>
           <a:lstStyle/>
@@ -17007,8 +17087,8 @@
         </p:nvSpPr>
         <p:spPr>
           <a:xfrm>
-            <a:off x="4507992" y="3129534"/>
-            <a:ext cx="7013448" cy="944118"/>
+            <a:off x="4507992" y="3138677"/>
+            <a:ext cx="7013448" cy="916686"/>
           </a:xfrm>
           <a:prstGeom prst="rect">
             <a:avLst/>
@@ -17016,7 +17096,7 @@
           <a:noFill/>
         </p:spPr>
         <p:txBody>
-          <a:bodyPr wrap="square" lIns="18288" rIns="18288" tIns="13716" bIns="13716">
+          <a:bodyPr wrap="square" anchor="ctr" lIns="18288" rIns="18288" tIns="13716" bIns="13716">
             <a:noAutofit/>
           </a:bodyPr>
           <a:lstStyle/>
@@ -17107,7 +17187,7 @@
         <p:spPr>
           <a:xfrm>
             <a:off x="1234440" y="4110228"/>
-            <a:ext cx="411480" cy="365760"/>
+            <a:ext cx="411480" cy="916686"/>
           </a:xfrm>
           <a:prstGeom prst="rect">
             <a:avLst/>
@@ -17115,7 +17195,7 @@
           <a:noFill/>
         </p:spPr>
         <p:txBody>
-          <a:bodyPr wrap="square" lIns="18288" rIns="18288" tIns="13716" bIns="13716">
+          <a:bodyPr wrap="square" anchor="ctr" lIns="18288" rIns="18288" tIns="13716" bIns="13716">
             <a:noAutofit/>
           </a:bodyPr>
           <a:lstStyle/>
@@ -17161,8 +17241,8 @@
         </p:nvSpPr>
         <p:spPr>
           <a:xfrm>
-            <a:off x="1755648" y="4101083"/>
-            <a:ext cx="2542032" cy="685800"/>
+            <a:off x="1755648" y="4110228"/>
+            <a:ext cx="2542032" cy="916686"/>
           </a:xfrm>
           <a:prstGeom prst="rect">
             <a:avLst/>
@@ -17170,7 +17250,7 @@
           <a:noFill/>
         </p:spPr>
         <p:txBody>
-          <a:bodyPr wrap="square" lIns="18288" rIns="18288" tIns="13716" bIns="13716">
+          <a:bodyPr wrap="square" anchor="ctr" lIns="18288" rIns="18288" tIns="13716" bIns="13716">
             <a:noAutofit/>
           </a:bodyPr>
           <a:lstStyle/>
@@ -17216,8 +17296,8 @@
         </p:nvSpPr>
         <p:spPr>
           <a:xfrm>
-            <a:off x="4507992" y="4101083"/>
-            <a:ext cx="7013448" cy="944118"/>
+            <a:off x="4507992" y="4110228"/>
+            <a:ext cx="7013448" cy="916686"/>
           </a:xfrm>
           <a:prstGeom prst="rect">
             <a:avLst/>
@@ -17225,7 +17305,7 @@
           <a:noFill/>
         </p:spPr>
         <p:txBody>
-          <a:bodyPr wrap="square" lIns="18288" rIns="18288" tIns="13716" bIns="13716">
+          <a:bodyPr wrap="square" anchor="ctr" lIns="18288" rIns="18288" tIns="13716" bIns="13716">
             <a:noAutofit/>
           </a:bodyPr>
           <a:lstStyle/>
@@ -17316,7 +17396,7 @@
         <p:spPr>
           <a:xfrm>
             <a:off x="1234440" y="5081778"/>
-            <a:ext cx="411480" cy="365760"/>
+            <a:ext cx="411480" cy="916686"/>
           </a:xfrm>
           <a:prstGeom prst="rect">
             <a:avLst/>
@@ -17324,7 +17404,7 @@
           <a:noFill/>
         </p:spPr>
         <p:txBody>
-          <a:bodyPr wrap="square" lIns="18288" rIns="18288" tIns="13716" bIns="13716">
+          <a:bodyPr wrap="square" anchor="ctr" lIns="18288" rIns="18288" tIns="13716" bIns="13716">
             <a:noAutofit/>
           </a:bodyPr>
           <a:lstStyle/>
@@ -17370,8 +17450,8 @@
         </p:nvSpPr>
         <p:spPr>
           <a:xfrm>
-            <a:off x="1755648" y="5072633"/>
-            <a:ext cx="2542032" cy="685800"/>
+            <a:off x="1755648" y="5081778"/>
+            <a:ext cx="2542032" cy="916686"/>
           </a:xfrm>
           <a:prstGeom prst="rect">
             <a:avLst/>
@@ -17379,7 +17459,7 @@
           <a:noFill/>
         </p:spPr>
         <p:txBody>
-          <a:bodyPr wrap="square" lIns="18288" rIns="18288" tIns="13716" bIns="13716">
+          <a:bodyPr wrap="square" anchor="ctr" lIns="18288" rIns="18288" tIns="13716" bIns="13716">
             <a:noAutofit/>
           </a:bodyPr>
           <a:lstStyle/>
@@ -17425,8 +17505,8 @@
         </p:nvSpPr>
         <p:spPr>
           <a:xfrm>
-            <a:off x="4507992" y="5072633"/>
-            <a:ext cx="7013448" cy="944118"/>
+            <a:off x="4507992" y="5081778"/>
+            <a:ext cx="7013448" cy="916686"/>
           </a:xfrm>
           <a:prstGeom prst="rect">
             <a:avLst/>
@@ -17434,7 +17514,7 @@
           <a:noFill/>
         </p:spPr>
         <p:txBody>
-          <a:bodyPr wrap="square" lIns="18288" rIns="18288" tIns="13716" bIns="13716">
+          <a:bodyPr wrap="square" anchor="ctr" lIns="18288" rIns="18288" tIns="13716" bIns="13716">
             <a:noAutofit/>
           </a:bodyPr>
           <a:lstStyle/>
@@ -17559,7 +17639,7 @@
           <a:noFill/>
         </p:spPr>
         <p:txBody>
-          <a:bodyPr wrap="square" lIns="18288" rIns="18288" tIns="13716" bIns="13716">
+          <a:bodyPr wrap="square" anchor="t" lIns="18288" rIns="18288" tIns="13716" bIns="13716">
             <a:noAutofit/>
           </a:bodyPr>
           <a:lstStyle/>
@@ -17614,7 +17694,7 @@
           <a:noFill/>
         </p:spPr>
         <p:txBody>
-          <a:bodyPr wrap="square" lIns="18288" rIns="18288" tIns="13716" bIns="13716">
+          <a:bodyPr wrap="square" anchor="t" lIns="18288" rIns="18288" tIns="13716" bIns="13716">
             <a:noAutofit/>
           </a:bodyPr>
           <a:lstStyle/>
@@ -17669,7 +17749,7 @@
           <a:noFill/>
         </p:spPr>
         <p:txBody>
-          <a:bodyPr wrap="square" lIns="18288" rIns="18288" tIns="13716" bIns="13716">
+          <a:bodyPr wrap="square" anchor="t" lIns="18288" rIns="18288" tIns="13716" bIns="13716">
             <a:noAutofit/>
           </a:bodyPr>
           <a:lstStyle/>
@@ -17768,7 +17848,7 @@
           <a:noFill/>
         </p:spPr>
         <p:txBody>
-          <a:bodyPr wrap="square" lIns="18288" rIns="18288" tIns="13716" bIns="13716">
+          <a:bodyPr wrap="square" anchor="t" lIns="18288" rIns="18288" tIns="13716" bIns="13716">
             <a:noAutofit/>
           </a:bodyPr>
           <a:lstStyle/>
@@ -17823,7 +17903,7 @@
           <a:noFill/>
         </p:spPr>
         <p:txBody>
-          <a:bodyPr wrap="square" lIns="18288" rIns="18288" tIns="13716" bIns="13716">
+          <a:bodyPr wrap="square" anchor="t" lIns="18288" rIns="18288" tIns="13716" bIns="13716">
             <a:noAutofit/>
           </a:bodyPr>
           <a:lstStyle/>
@@ -17878,7 +17958,7 @@
           <a:noFill/>
         </p:spPr>
         <p:txBody>
-          <a:bodyPr wrap="square" lIns="18288" rIns="18288" tIns="13716" bIns="13716">
+          <a:bodyPr wrap="square" anchor="t" lIns="18288" rIns="18288" tIns="13716" bIns="13716">
             <a:noAutofit/>
           </a:bodyPr>
           <a:lstStyle/>
@@ -17966,7 +18046,7 @@
           <a:noFill/>
         </p:spPr>
         <p:txBody>
-          <a:bodyPr wrap="square" lIns="18288" rIns="18288" tIns="13716" bIns="13716">
+          <a:bodyPr wrap="square" anchor="t" lIns="18288" rIns="18288" tIns="13716" bIns="13716">
             <a:noAutofit/>
           </a:bodyPr>
           <a:lstStyle/>
@@ -18021,7 +18101,7 @@
           <a:noFill/>
         </p:spPr>
         <p:txBody>
-          <a:bodyPr wrap="square" lIns="18288" rIns="18288" tIns="13716" bIns="13716">
+          <a:bodyPr wrap="square" anchor="t" lIns="18288" rIns="18288" tIns="13716" bIns="13716">
             <a:noAutofit/>
           </a:bodyPr>
           <a:lstStyle/>
@@ -18076,7 +18156,7 @@
           <a:noFill/>
         </p:spPr>
         <p:txBody>
-          <a:bodyPr wrap="square" lIns="18288" rIns="18288" tIns="13716" bIns="13716">
+          <a:bodyPr wrap="square" anchor="t" lIns="18288" rIns="18288" tIns="13716" bIns="13716">
             <a:noAutofit/>
           </a:bodyPr>
           <a:lstStyle/>
@@ -18131,7 +18211,7 @@
           <a:noFill/>
         </p:spPr>
         <p:txBody>
-          <a:bodyPr wrap="square" lIns="18288" rIns="18288" tIns="13716" bIns="13716">
+          <a:bodyPr wrap="square" anchor="t" lIns="18288" rIns="18288" tIns="13716" bIns="13716">
             <a:noAutofit/>
           </a:bodyPr>
           <a:lstStyle/>
@@ -18219,7 +18299,7 @@
           <a:noFill/>
         </p:spPr>
         <p:txBody>
-          <a:bodyPr wrap="square" lIns="18288" rIns="18288" tIns="13716" bIns="13716">
+          <a:bodyPr wrap="square" anchor="t" lIns="18288" rIns="18288" tIns="13716" bIns="13716">
             <a:noAutofit/>
           </a:bodyPr>
           <a:lstStyle/>
@@ -18274,7 +18354,7 @@
           <a:noFill/>
         </p:spPr>
         <p:txBody>
-          <a:bodyPr wrap="square" lIns="18288" rIns="18288" tIns="13716" bIns="13716">
+          <a:bodyPr wrap="square" anchor="t" lIns="18288" rIns="18288" tIns="13716" bIns="13716">
             <a:noAutofit/>
           </a:bodyPr>
           <a:lstStyle/>
@@ -18329,7 +18409,7 @@
           <a:noFill/>
         </p:spPr>
         <p:txBody>
-          <a:bodyPr wrap="square" lIns="18288" rIns="18288" tIns="13716" bIns="13716">
+          <a:bodyPr wrap="square" anchor="t" lIns="18288" rIns="18288" tIns="13716" bIns="13716">
             <a:noAutofit/>
           </a:bodyPr>
           <a:lstStyle/>
@@ -18384,7 +18464,7 @@
           <a:noFill/>
         </p:spPr>
         <p:txBody>
-          <a:bodyPr wrap="square" lIns="18288" rIns="18288" tIns="13716" bIns="13716">
+          <a:bodyPr wrap="square" anchor="t" lIns="18288" rIns="18288" tIns="13716" bIns="13716">
             <a:noAutofit/>
           </a:bodyPr>
           <a:lstStyle/>
@@ -18472,7 +18552,7 @@
           <a:noFill/>
         </p:spPr>
         <p:txBody>
-          <a:bodyPr wrap="square" lIns="18288" rIns="18288" tIns="13716" bIns="13716">
+          <a:bodyPr wrap="square" anchor="t" lIns="18288" rIns="18288" tIns="13716" bIns="13716">
             <a:noAutofit/>
           </a:bodyPr>
           <a:lstStyle/>
@@ -18527,7 +18607,7 @@
           <a:noFill/>
         </p:spPr>
         <p:txBody>
-          <a:bodyPr wrap="square" lIns="18288" rIns="18288" tIns="13716" bIns="13716">
+          <a:bodyPr wrap="square" anchor="t" lIns="18288" rIns="18288" tIns="13716" bIns="13716">
             <a:noAutofit/>
           </a:bodyPr>
           <a:lstStyle/>
@@ -18582,7 +18662,7 @@
           <a:noFill/>
         </p:spPr>
         <p:txBody>
-          <a:bodyPr wrap="square" lIns="18288" rIns="18288" tIns="13716" bIns="13716">
+          <a:bodyPr wrap="square" anchor="t" lIns="18288" rIns="18288" tIns="13716" bIns="13716">
             <a:noAutofit/>
           </a:bodyPr>
           <a:lstStyle/>
@@ -18707,7 +18787,7 @@
           <a:noFill/>
         </p:spPr>
         <p:txBody>
-          <a:bodyPr wrap="square" lIns="18288" rIns="18288" tIns="13716" bIns="13716">
+          <a:bodyPr wrap="square" anchor="t" lIns="18288" rIns="18288" tIns="13716" bIns="13716">
             <a:noAutofit/>
           </a:bodyPr>
           <a:lstStyle/>
@@ -18762,7 +18842,7 @@
           <a:noFill/>
         </p:spPr>
         <p:txBody>
-          <a:bodyPr wrap="square" lIns="18288" rIns="18288" tIns="13716" bIns="13716">
+          <a:bodyPr wrap="square" anchor="t" lIns="18288" rIns="18288" tIns="13716" bIns="13716">
             <a:noAutofit/>
           </a:bodyPr>
           <a:lstStyle/>
@@ -18817,7 +18897,7 @@
           <a:noFill/>
         </p:spPr>
         <p:txBody>
-          <a:bodyPr wrap="square" lIns="18288" rIns="18288" tIns="13716" bIns="13716">
+          <a:bodyPr wrap="square" anchor="t" lIns="18288" rIns="18288" tIns="13716" bIns="13716">
             <a:noAutofit/>
           </a:bodyPr>
           <a:lstStyle/>
@@ -18916,7 +18996,7 @@
           <a:noFill/>
         </p:spPr>
         <p:txBody>
-          <a:bodyPr wrap="square" lIns="18288" rIns="18288" tIns="13716" bIns="13716">
+          <a:bodyPr wrap="square" anchor="t" lIns="18288" rIns="18288" tIns="13716" bIns="13716">
             <a:noAutofit/>
           </a:bodyPr>
           <a:lstStyle/>
@@ -18971,7 +19051,7 @@
           <a:noFill/>
         </p:spPr>
         <p:txBody>
-          <a:bodyPr wrap="square" lIns="18288" rIns="18288" tIns="13716" bIns="13716">
+          <a:bodyPr wrap="square" anchor="t" lIns="18288" rIns="18288" tIns="13716" bIns="13716">
             <a:noAutofit/>
           </a:bodyPr>
           <a:lstStyle/>
@@ -19070,7 +19150,7 @@
           <a:noFill/>
         </p:spPr>
         <p:txBody>
-          <a:bodyPr wrap="square" lIns="18288" rIns="18288" tIns="13716" bIns="13716">
+          <a:bodyPr wrap="square" anchor="t" lIns="18288" rIns="18288" tIns="13716" bIns="13716">
             <a:noAutofit/>
           </a:bodyPr>
           <a:lstStyle/>
@@ -19125,7 +19205,7 @@
           <a:noFill/>
         </p:spPr>
         <p:txBody>
-          <a:bodyPr wrap="square" lIns="18288" rIns="18288" tIns="13716" bIns="13716">
+          <a:bodyPr wrap="square" anchor="t" lIns="18288" rIns="18288" tIns="13716" bIns="13716">
             <a:noAutofit/>
           </a:bodyPr>
           <a:lstStyle/>
@@ -19180,7 +19260,7 @@
           <a:noFill/>
         </p:spPr>
         <p:txBody>
-          <a:bodyPr wrap="square" lIns="18288" rIns="18288" tIns="13716" bIns="13716">
+          <a:bodyPr wrap="square" anchor="t" lIns="18288" rIns="18288" tIns="13716" bIns="13716">
             <a:noAutofit/>
           </a:bodyPr>
           <a:lstStyle/>
@@ -19281,7 +19361,7 @@
           <a:noFill/>
         </p:spPr>
         <p:txBody>
-          <a:bodyPr wrap="square" lIns="18288" rIns="18288" tIns="13716" bIns="13716">
+          <a:bodyPr wrap="square" anchor="t" lIns="18288" rIns="18288" tIns="13716" bIns="13716">
             <a:noAutofit/>
           </a:bodyPr>
           <a:lstStyle/>
@@ -19336,7 +19416,7 @@
           <a:noFill/>
         </p:spPr>
         <p:txBody>
-          <a:bodyPr wrap="square" lIns="18288" rIns="18288" tIns="13716" bIns="13716">
+          <a:bodyPr wrap="square" anchor="t" lIns="18288" rIns="18288" tIns="13716" bIns="13716">
             <a:noAutofit/>
           </a:bodyPr>
           <a:lstStyle/>
@@ -19391,7 +19471,7 @@
           <a:noFill/>
         </p:spPr>
         <p:txBody>
-          <a:bodyPr wrap="square" lIns="18288" rIns="18288" tIns="13716" bIns="13716">
+          <a:bodyPr wrap="square" anchor="t" lIns="18288" rIns="18288" tIns="13716" bIns="13716">
             <a:noAutofit/>
           </a:bodyPr>
           <a:lstStyle/>
@@ -19492,7 +19572,7 @@
           <a:noFill/>
         </p:spPr>
         <p:txBody>
-          <a:bodyPr wrap="square" lIns="18288" rIns="18288" tIns="13716" bIns="13716">
+          <a:bodyPr wrap="square" anchor="t" lIns="18288" rIns="18288" tIns="13716" bIns="13716">
             <a:noAutofit/>
           </a:bodyPr>
           <a:lstStyle/>
@@ -19547,7 +19627,7 @@
           <a:noFill/>
         </p:spPr>
         <p:txBody>
-          <a:bodyPr wrap="square" lIns="18288" rIns="18288" tIns="13716" bIns="13716">
+          <a:bodyPr wrap="square" anchor="t" lIns="18288" rIns="18288" tIns="13716" bIns="13716">
             <a:noAutofit/>
           </a:bodyPr>
           <a:lstStyle/>
@@ -19602,7 +19682,7 @@
           <a:noFill/>
         </p:spPr>
         <p:txBody>
-          <a:bodyPr wrap="square" lIns="18288" rIns="18288" tIns="13716" bIns="13716">
+          <a:bodyPr wrap="square" anchor="t" lIns="18288" rIns="18288" tIns="13716" bIns="13716">
             <a:noAutofit/>
           </a:bodyPr>
           <a:lstStyle/>
@@ -19703,7 +19783,7 @@
           <a:noFill/>
         </p:spPr>
         <p:txBody>
-          <a:bodyPr wrap="square" lIns="18288" rIns="18288" tIns="13716" bIns="13716">
+          <a:bodyPr wrap="square" anchor="t" lIns="18288" rIns="18288" tIns="13716" bIns="13716">
             <a:noAutofit/>
           </a:bodyPr>
           <a:lstStyle/>
@@ -19758,7 +19838,7 @@
           <a:noFill/>
         </p:spPr>
         <p:txBody>
-          <a:bodyPr wrap="square" lIns="18288" rIns="18288" tIns="13716" bIns="13716">
+          <a:bodyPr wrap="square" anchor="t" lIns="18288" rIns="18288" tIns="13716" bIns="13716">
             <a:noAutofit/>
           </a:bodyPr>
           <a:lstStyle/>
@@ -19813,7 +19893,7 @@
           <a:noFill/>
         </p:spPr>
         <p:txBody>
-          <a:bodyPr wrap="square" lIns="18288" rIns="18288" tIns="13716" bIns="13716">
+          <a:bodyPr wrap="square" anchor="t" lIns="18288" rIns="18288" tIns="13716" bIns="13716">
             <a:noAutofit/>
           </a:bodyPr>
           <a:lstStyle/>
@@ -19938,7 +20018,7 @@
           <a:noFill/>
         </p:spPr>
         <p:txBody>
-          <a:bodyPr wrap="square" lIns="18288" rIns="18288" tIns="13716" bIns="13716">
+          <a:bodyPr wrap="square" anchor="t" lIns="18288" rIns="18288" tIns="13716" bIns="13716">
             <a:noAutofit/>
           </a:bodyPr>
           <a:lstStyle/>
@@ -19993,7 +20073,7 @@
           <a:noFill/>
         </p:spPr>
         <p:txBody>
-          <a:bodyPr wrap="square" lIns="18288" rIns="18288" tIns="13716" bIns="13716">
+          <a:bodyPr wrap="square" anchor="t" lIns="18288" rIns="18288" tIns="13716" bIns="13716">
             <a:noAutofit/>
           </a:bodyPr>
           <a:lstStyle/>
@@ -20048,7 +20128,7 @@
           <a:noFill/>
         </p:spPr>
         <p:txBody>
-          <a:bodyPr wrap="square" lIns="18288" rIns="18288" tIns="13716" bIns="13716">
+          <a:bodyPr wrap="square" anchor="t" lIns="18288" rIns="18288" tIns="13716" bIns="13716">
             <a:noAutofit/>
           </a:bodyPr>
           <a:lstStyle/>
@@ -20147,7 +20227,7 @@
           <a:noFill/>
         </p:spPr>
         <p:txBody>
-          <a:bodyPr wrap="square" lIns="18288" rIns="18288" tIns="13716" bIns="13716">
+          <a:bodyPr wrap="square" anchor="t" lIns="18288" rIns="18288" tIns="13716" bIns="13716">
             <a:noAutofit/>
           </a:bodyPr>
           <a:lstStyle/>
@@ -20202,7 +20282,7 @@
           <a:noFill/>
         </p:spPr>
         <p:txBody>
-          <a:bodyPr wrap="square" lIns="18288" rIns="18288" tIns="13716" bIns="13716">
+          <a:bodyPr wrap="square" anchor="t" lIns="18288" rIns="18288" tIns="13716" bIns="13716">
             <a:noAutofit/>
           </a:bodyPr>
           <a:lstStyle/>
@@ -20266,7 +20346,7 @@
               <a:tr h="713232">
                 <a:tc>
                   <a:txBody>
-                    <a:bodyPr wrap="square" lIns="18288" rIns="18288" tIns="13716" bIns="13716">
+                    <a:bodyPr wrap="square" anchor="t" lIns="18288" rIns="18288" tIns="13716" bIns="13716">
                       <a:noAutofit/>
                     </a:bodyPr>
                     <a:lstStyle/>
@@ -20303,7 +20383,7 @@
                       </a:r>
                     </a:p>
                   </a:txBody>
-                  <a:tcPr marL="155448" marR="155448" marT="64008" marB="64008">
+                  <a:tcPr marL="155448" marR="155448" marT="64008" marB="64008" anchor="ctr">
                     <a:solidFill>
                       <a:srgbClr val="213547"/>
                     </a:solidFill>
@@ -20311,7 +20391,7 @@
                 </a:tc>
                 <a:tc>
                   <a:txBody>
-                    <a:bodyPr wrap="square" lIns="18288" rIns="18288" tIns="13716" bIns="13716">
+                    <a:bodyPr wrap="square" anchor="t" lIns="18288" rIns="18288" tIns="13716" bIns="13716">
                       <a:noAutofit/>
                     </a:bodyPr>
                     <a:lstStyle/>
@@ -20348,7 +20428,7 @@
                       </a:r>
                     </a:p>
                   </a:txBody>
-                  <a:tcPr marL="155448" marR="155448" marT="64008" marB="64008">
+                  <a:tcPr marL="155448" marR="155448" marT="64008" marB="64008" anchor="ctr">
                     <a:solidFill>
                       <a:srgbClr val="213547"/>
                     </a:solidFill>
@@ -20356,7 +20436,7 @@
                 </a:tc>
                 <a:tc>
                   <a:txBody>
-                    <a:bodyPr wrap="square" lIns="18288" rIns="18288" tIns="13716" bIns="13716">
+                    <a:bodyPr wrap="square" anchor="t" lIns="18288" rIns="18288" tIns="13716" bIns="13716">
                       <a:noAutofit/>
                     </a:bodyPr>
                     <a:lstStyle/>
@@ -20393,7 +20473,7 @@
                       </a:r>
                     </a:p>
                   </a:txBody>
-                  <a:tcPr marL="155448" marR="155448" marT="64008" marB="64008">
+                  <a:tcPr marL="155448" marR="155448" marT="64008" marB="64008" anchor="ctr">
                     <a:solidFill>
                       <a:srgbClr val="213547"/>
                     </a:solidFill>
@@ -20403,7 +20483,7 @@
               <a:tr h="713232">
                 <a:tc>
                   <a:txBody>
-                    <a:bodyPr wrap="square" lIns="18288" rIns="18288" tIns="13716" bIns="13716">
+                    <a:bodyPr wrap="square" anchor="t" lIns="18288" rIns="18288" tIns="13716" bIns="13716">
                       <a:noAutofit/>
                     </a:bodyPr>
                     <a:lstStyle/>
@@ -20440,7 +20520,7 @@
                       </a:r>
                     </a:p>
                   </a:txBody>
-                  <a:tcPr marL="155448" marR="155448" marT="64008" marB="64008">
+                  <a:tcPr marL="155448" marR="155448" marT="64008" marB="64008" anchor="ctr">
                     <a:solidFill>
                       <a:srgbClr val="FFFFFF"/>
                     </a:solidFill>
@@ -20448,7 +20528,7 @@
                 </a:tc>
                 <a:tc>
                   <a:txBody>
-                    <a:bodyPr wrap="square" lIns="18288" rIns="18288" tIns="13716" bIns="13716">
+                    <a:bodyPr wrap="square" anchor="t" lIns="18288" rIns="18288" tIns="13716" bIns="13716">
                       <a:noAutofit/>
                     </a:bodyPr>
                     <a:lstStyle/>
@@ -20485,7 +20565,7 @@
                       </a:r>
                     </a:p>
                   </a:txBody>
-                  <a:tcPr marL="155448" marR="155448" marT="64008" marB="64008">
+                  <a:tcPr marL="155448" marR="155448" marT="64008" marB="64008" anchor="ctr">
                     <a:solidFill>
                       <a:srgbClr val="FFFFFF"/>
                     </a:solidFill>
@@ -20493,7 +20573,7 @@
                 </a:tc>
                 <a:tc>
                   <a:txBody>
-                    <a:bodyPr wrap="square" lIns="18288" rIns="18288" tIns="13716" bIns="13716">
+                    <a:bodyPr wrap="square" anchor="t" lIns="18288" rIns="18288" tIns="13716" bIns="13716">
                       <a:noAutofit/>
                     </a:bodyPr>
                     <a:lstStyle/>
@@ -20562,7 +20642,7 @@
                       </a:r>
                     </a:p>
                   </a:txBody>
-                  <a:tcPr marL="155448" marR="155448" marT="64008" marB="64008">
+                  <a:tcPr marL="155448" marR="155448" marT="64008" marB="64008" anchor="ctr">
                     <a:solidFill>
                       <a:srgbClr val="FFFFFF"/>
                     </a:solidFill>
@@ -20572,7 +20652,7 @@
               <a:tr h="713232">
                 <a:tc>
                   <a:txBody>
-                    <a:bodyPr wrap="square" lIns="18288" rIns="18288" tIns="13716" bIns="13716">
+                    <a:bodyPr wrap="square" anchor="t" lIns="18288" rIns="18288" tIns="13716" bIns="13716">
                       <a:noAutofit/>
                     </a:bodyPr>
                     <a:lstStyle/>
@@ -20609,7 +20689,7 @@
                       </a:r>
                     </a:p>
                   </a:txBody>
-                  <a:tcPr marL="155448" marR="155448" marT="64008" marB="64008">
+                  <a:tcPr marL="155448" marR="155448" marT="64008" marB="64008" anchor="ctr">
                     <a:solidFill>
                       <a:srgbClr val="EDF1F4"/>
                     </a:solidFill>
@@ -20617,7 +20697,7 @@
                 </a:tc>
                 <a:tc>
                   <a:txBody>
-                    <a:bodyPr wrap="square" lIns="18288" rIns="18288" tIns="13716" bIns="13716">
+                    <a:bodyPr wrap="square" anchor="t" lIns="18288" rIns="18288" tIns="13716" bIns="13716">
                       <a:noAutofit/>
                     </a:bodyPr>
                     <a:lstStyle/>
@@ -20654,7 +20734,7 @@
                       </a:r>
                     </a:p>
                   </a:txBody>
-                  <a:tcPr marL="155448" marR="155448" marT="64008" marB="64008">
+                  <a:tcPr marL="155448" marR="155448" marT="64008" marB="64008" anchor="ctr">
                     <a:solidFill>
                       <a:srgbClr val="EDF1F4"/>
                     </a:solidFill>
@@ -20662,7 +20742,7 @@
                 </a:tc>
                 <a:tc>
                   <a:txBody>
-                    <a:bodyPr wrap="square" lIns="18288" rIns="18288" tIns="13716" bIns="13716">
+                    <a:bodyPr wrap="square" anchor="t" lIns="18288" rIns="18288" tIns="13716" bIns="13716">
                       <a:noAutofit/>
                     </a:bodyPr>
                     <a:lstStyle/>
@@ -20731,7 +20811,7 @@
                       </a:r>
                     </a:p>
                   </a:txBody>
-                  <a:tcPr marL="155448" marR="155448" marT="64008" marB="64008">
+                  <a:tcPr marL="155448" marR="155448" marT="64008" marB="64008" anchor="ctr">
                     <a:solidFill>
                       <a:srgbClr val="EDF1F4"/>
                     </a:solidFill>
@@ -20741,7 +20821,7 @@
               <a:tr h="713232">
                 <a:tc>
                   <a:txBody>
-                    <a:bodyPr wrap="square" lIns="18288" rIns="18288" tIns="13716" bIns="13716">
+                    <a:bodyPr wrap="square" anchor="t" lIns="18288" rIns="18288" tIns="13716" bIns="13716">
                       <a:noAutofit/>
                     </a:bodyPr>
                     <a:lstStyle/>
@@ -20778,7 +20858,7 @@
                       </a:r>
                     </a:p>
                   </a:txBody>
-                  <a:tcPr marL="155448" marR="155448" marT="64008" marB="64008">
+                  <a:tcPr marL="155448" marR="155448" marT="64008" marB="64008" anchor="ctr">
                     <a:solidFill>
                       <a:srgbClr val="FFFFFF"/>
                     </a:solidFill>
@@ -20786,7 +20866,7 @@
                 </a:tc>
                 <a:tc>
                   <a:txBody>
-                    <a:bodyPr wrap="square" lIns="18288" rIns="18288" tIns="13716" bIns="13716">
+                    <a:bodyPr wrap="square" anchor="t" lIns="18288" rIns="18288" tIns="13716" bIns="13716">
                       <a:noAutofit/>
                     </a:bodyPr>
                     <a:lstStyle/>
@@ -20823,7 +20903,7 @@
                       </a:r>
                     </a:p>
                   </a:txBody>
-                  <a:tcPr marL="155448" marR="155448" marT="64008" marB="64008">
+                  <a:tcPr marL="155448" marR="155448" marT="64008" marB="64008" anchor="ctr">
                     <a:solidFill>
                       <a:srgbClr val="FFFFFF"/>
                     </a:solidFill>
@@ -20831,7 +20911,7 @@
                 </a:tc>
                 <a:tc>
                   <a:txBody>
-                    <a:bodyPr wrap="square" lIns="18288" rIns="18288" tIns="13716" bIns="13716">
+                    <a:bodyPr wrap="square" anchor="t" lIns="18288" rIns="18288" tIns="13716" bIns="13716">
                       <a:noAutofit/>
                     </a:bodyPr>
                     <a:lstStyle/>
@@ -20900,7 +20980,7 @@
                       </a:r>
                     </a:p>
                   </a:txBody>
-                  <a:tcPr marL="155448" marR="155448" marT="64008" marB="64008">
+                  <a:tcPr marL="155448" marR="155448" marT="64008" marB="64008" anchor="ctr">
                     <a:solidFill>
                       <a:srgbClr val="FFFFFF"/>
                     </a:solidFill>
@@ -20910,7 +20990,7 @@
               <a:tr h="713232">
                 <a:tc>
                   <a:txBody>
-                    <a:bodyPr wrap="square" lIns="18288" rIns="18288" tIns="13716" bIns="13716">
+                    <a:bodyPr wrap="square" anchor="t" lIns="18288" rIns="18288" tIns="13716" bIns="13716">
                       <a:noAutofit/>
                     </a:bodyPr>
                     <a:lstStyle/>
@@ -20947,7 +21027,7 @@
                       </a:r>
                     </a:p>
                   </a:txBody>
-                  <a:tcPr marL="155448" marR="155448" marT="64008" marB="64008">
+                  <a:tcPr marL="155448" marR="155448" marT="64008" marB="64008" anchor="ctr">
                     <a:solidFill>
                       <a:srgbClr val="EDF1F4"/>
                     </a:solidFill>
@@ -20955,7 +21035,7 @@
                 </a:tc>
                 <a:tc>
                   <a:txBody>
-                    <a:bodyPr wrap="square" lIns="18288" rIns="18288" tIns="13716" bIns="13716">
+                    <a:bodyPr wrap="square" anchor="t" lIns="18288" rIns="18288" tIns="13716" bIns="13716">
                       <a:noAutofit/>
                     </a:bodyPr>
                     <a:lstStyle/>
@@ -20992,7 +21072,7 @@
                       </a:r>
                     </a:p>
                   </a:txBody>
-                  <a:tcPr marL="155448" marR="155448" marT="64008" marB="64008">
+                  <a:tcPr marL="155448" marR="155448" marT="64008" marB="64008" anchor="ctr">
                     <a:solidFill>
                       <a:srgbClr val="EDF1F4"/>
                     </a:solidFill>
@@ -21000,7 +21080,7 @@
                 </a:tc>
                 <a:tc>
                   <a:txBody>
-                    <a:bodyPr wrap="square" lIns="18288" rIns="18288" tIns="13716" bIns="13716">
+                    <a:bodyPr wrap="square" anchor="t" lIns="18288" rIns="18288" tIns="13716" bIns="13716">
                       <a:noAutofit/>
                     </a:bodyPr>
                     <a:lstStyle/>
@@ -21069,7 +21149,7 @@
                       </a:r>
                     </a:p>
                   </a:txBody>
-                  <a:tcPr marL="155448" marR="155448" marT="64008" marB="64008">
+                  <a:tcPr marL="155448" marR="155448" marT="64008" marB="64008" anchor="ctr">
                     <a:solidFill>
                       <a:srgbClr val="EDF1F4"/>
                     </a:solidFill>
@@ -21097,7 +21177,7 @@
           <a:noFill/>
         </p:spPr>
         <p:txBody>
-          <a:bodyPr wrap="square" lIns="18288" rIns="18288" tIns="13716" bIns="13716">
+          <a:bodyPr wrap="square" anchor="t" lIns="18288" rIns="18288" tIns="13716" bIns="13716">
             <a:noAutofit/>
           </a:bodyPr>
           <a:lstStyle/>
@@ -21222,7 +21302,7 @@
           <a:noFill/>
         </p:spPr>
         <p:txBody>
-          <a:bodyPr wrap="square" lIns="18288" rIns="18288" tIns="13716" bIns="13716">
+          <a:bodyPr wrap="square" anchor="t" lIns="18288" rIns="18288" tIns="13716" bIns="13716">
             <a:noAutofit/>
           </a:bodyPr>
           <a:lstStyle/>
@@ -21277,7 +21357,7 @@
           <a:noFill/>
         </p:spPr>
         <p:txBody>
-          <a:bodyPr wrap="square" lIns="18288" rIns="18288" tIns="13716" bIns="13716">
+          <a:bodyPr wrap="square" anchor="t" lIns="18288" rIns="18288" tIns="13716" bIns="13716">
             <a:noAutofit/>
           </a:bodyPr>
           <a:lstStyle/>
@@ -21332,7 +21412,7 @@
           <a:noFill/>
         </p:spPr>
         <p:txBody>
-          <a:bodyPr wrap="square" lIns="18288" rIns="18288" tIns="13716" bIns="13716">
+          <a:bodyPr wrap="square" anchor="t" lIns="18288" rIns="18288" tIns="13716" bIns="13716">
             <a:noAutofit/>
           </a:bodyPr>
           <a:lstStyle/>
@@ -21431,7 +21511,7 @@
           <a:noFill/>
         </p:spPr>
         <p:txBody>
-          <a:bodyPr wrap="square" lIns="18288" rIns="18288" tIns="13716" bIns="13716">
+          <a:bodyPr wrap="square" anchor="t" lIns="18288" rIns="18288" tIns="13716" bIns="13716">
             <a:noAutofit/>
           </a:bodyPr>
           <a:lstStyle/>
@@ -21486,7 +21566,7 @@
           <a:noFill/>
         </p:spPr>
         <p:txBody>
-          <a:bodyPr wrap="square" lIns="18288" rIns="18288" tIns="13716" bIns="13716">
+          <a:bodyPr wrap="square" anchor="t" lIns="18288" rIns="18288" tIns="13716" bIns="13716">
             <a:noAutofit/>
           </a:bodyPr>
           <a:lstStyle/>
@@ -21541,7 +21621,7 @@
           <a:noFill/>
         </p:spPr>
         <p:txBody>
-          <a:bodyPr wrap="square" lIns="18288" rIns="18288" tIns="13716" bIns="13716">
+          <a:bodyPr wrap="square" anchor="t" lIns="18288" rIns="18288" tIns="13716" bIns="13716">
             <a:noAutofit/>
           </a:bodyPr>
           <a:lstStyle/>
@@ -21614,7 +21694,7 @@
           <a:noFill/>
         </p:spPr>
         <p:txBody>
-          <a:bodyPr wrap="square" lIns="18288" rIns="18288" tIns="13716" bIns="13716">
+          <a:bodyPr wrap="square" anchor="t" lIns="18288" rIns="18288" tIns="13716" bIns="13716">
             <a:noAutofit/>
           </a:bodyPr>
           <a:lstStyle/>
@@ -21669,7 +21749,7 @@
           <a:noFill/>
         </p:spPr>
         <p:txBody>
-          <a:bodyPr wrap="square" lIns="18288" rIns="18288" tIns="13716" bIns="13716">
+          <a:bodyPr wrap="square" anchor="t" lIns="18288" rIns="18288" tIns="13716" bIns="13716">
             <a:noAutofit/>
           </a:bodyPr>
           <a:lstStyle/>
@@ -21794,7 +21874,7 @@
           <a:noFill/>
         </p:spPr>
         <p:txBody>
-          <a:bodyPr wrap="square" lIns="18288" rIns="18288" tIns="13716" bIns="13716">
+          <a:bodyPr wrap="square" anchor="t" lIns="18288" rIns="18288" tIns="13716" bIns="13716">
             <a:noAutofit/>
           </a:bodyPr>
           <a:lstStyle/>
@@ -21849,7 +21929,7 @@
           <a:noFill/>
         </p:spPr>
         <p:txBody>
-          <a:bodyPr wrap="square" lIns="18288" rIns="18288" tIns="13716" bIns="13716">
+          <a:bodyPr wrap="square" anchor="t" lIns="18288" rIns="18288" tIns="13716" bIns="13716">
             <a:noAutofit/>
           </a:bodyPr>
           <a:lstStyle/>
@@ -21904,7 +21984,7 @@
           <a:noFill/>
         </p:spPr>
         <p:txBody>
-          <a:bodyPr wrap="square" lIns="18288" rIns="18288" tIns="13716" bIns="13716">
+          <a:bodyPr wrap="square" anchor="t" lIns="18288" rIns="18288" tIns="13716" bIns="13716">
             <a:noAutofit/>
           </a:bodyPr>
           <a:lstStyle/>
@@ -22003,7 +22083,7 @@
           <a:noFill/>
         </p:spPr>
         <p:txBody>
-          <a:bodyPr wrap="square" lIns="18288" rIns="18288" tIns="13716" bIns="13716">
+          <a:bodyPr wrap="square" anchor="t" lIns="18288" rIns="18288" tIns="13716" bIns="13716">
             <a:noAutofit/>
           </a:bodyPr>
           <a:lstStyle/>
@@ -22058,7 +22138,7 @@
           <a:noFill/>
         </p:spPr>
         <p:txBody>
-          <a:bodyPr wrap="square" lIns="18288" rIns="18288" tIns="13716" bIns="13716">
+          <a:bodyPr wrap="square" anchor="t" lIns="18288" rIns="18288" tIns="13716" bIns="13716">
             <a:noAutofit/>
           </a:bodyPr>
           <a:lstStyle/>
@@ -22157,7 +22237,7 @@
           <a:noFill/>
         </p:spPr>
         <p:txBody>
-          <a:bodyPr wrap="square" lIns="18288" rIns="18288" tIns="13716" bIns="13716">
+          <a:bodyPr wrap="square" anchor="t" lIns="18288" rIns="18288" tIns="13716" bIns="13716">
             <a:noAutofit/>
           </a:bodyPr>
           <a:lstStyle/>
@@ -22212,7 +22292,7 @@
           <a:noFill/>
         </p:spPr>
         <p:txBody>
-          <a:bodyPr wrap="square" lIns="18288" rIns="18288" tIns="13716" bIns="13716">
+          <a:bodyPr wrap="square" anchor="t" lIns="18288" rIns="18288" tIns="13716" bIns="13716">
             <a:noAutofit/>
           </a:bodyPr>
           <a:lstStyle/>
@@ -22267,7 +22347,7 @@
           <a:noFill/>
         </p:spPr>
         <p:txBody>
-          <a:bodyPr wrap="square" lIns="18288" rIns="18288" tIns="13716" bIns="13716">
+          <a:bodyPr wrap="square" anchor="t" lIns="18288" rIns="18288" tIns="13716" bIns="13716">
             <a:noAutofit/>
           </a:bodyPr>
           <a:lstStyle/>
@@ -22322,7 +22402,7 @@
           <a:noFill/>
         </p:spPr>
         <p:txBody>
-          <a:bodyPr wrap="square" lIns="18288" rIns="18288" tIns="13716" bIns="13716">
+          <a:bodyPr wrap="square" anchor="t" lIns="18288" rIns="18288" tIns="13716" bIns="13716">
             <a:noAutofit/>
           </a:bodyPr>
           <a:lstStyle/>
@@ -22447,7 +22527,7 @@
           <a:noFill/>
         </p:spPr>
         <p:txBody>
-          <a:bodyPr wrap="square" lIns="18288" rIns="18288" tIns="13716" bIns="13716">
+          <a:bodyPr wrap="square" anchor="t" lIns="18288" rIns="18288" tIns="13716" bIns="13716">
             <a:noAutofit/>
           </a:bodyPr>
           <a:lstStyle/>
@@ -22502,7 +22582,7 @@
           <a:noFill/>
         </p:spPr>
         <p:txBody>
-          <a:bodyPr wrap="square" lIns="18288" rIns="18288" tIns="13716" bIns="13716">
+          <a:bodyPr wrap="square" anchor="t" lIns="18288" rIns="18288" tIns="13716" bIns="13716">
             <a:noAutofit/>
           </a:bodyPr>
           <a:lstStyle/>
@@ -22557,7 +22637,7 @@
           <a:noFill/>
         </p:spPr>
         <p:txBody>
-          <a:bodyPr wrap="square" lIns="18288" rIns="18288" tIns="13716" bIns="13716">
+          <a:bodyPr wrap="square" anchor="t" lIns="18288" rIns="18288" tIns="13716" bIns="13716">
             <a:noAutofit/>
           </a:bodyPr>
           <a:lstStyle/>
@@ -22656,7 +22736,7 @@
           <a:noFill/>
         </p:spPr>
         <p:txBody>
-          <a:bodyPr wrap="square" lIns="18288" rIns="18288" tIns="13716" bIns="13716">
+          <a:bodyPr wrap="square" anchor="t" lIns="18288" rIns="18288" tIns="13716" bIns="13716">
             <a:noAutofit/>
           </a:bodyPr>
           <a:lstStyle/>
@@ -22711,7 +22791,7 @@
           <a:noFill/>
         </p:spPr>
         <p:txBody>
-          <a:bodyPr wrap="square" lIns="18288" rIns="18288" tIns="13716" bIns="13716">
+          <a:bodyPr wrap="square" anchor="t" lIns="18288" rIns="18288" tIns="13716" bIns="13716">
             <a:noAutofit/>
           </a:bodyPr>
           <a:lstStyle/>
@@ -22801,8 +22881,8 @@
         </p:nvSpPr>
         <p:spPr>
           <a:xfrm>
-            <a:off x="694944" y="2176272"/>
-            <a:ext cx="2834640" cy="685800"/>
+            <a:off x="694944" y="2185415"/>
+            <a:ext cx="2834640" cy="1231391"/>
           </a:xfrm>
           <a:prstGeom prst="rect">
             <a:avLst/>
@@ -22810,7 +22890,7 @@
           <a:noFill/>
         </p:spPr>
         <p:txBody>
-          <a:bodyPr wrap="square" lIns="18288" rIns="18288" tIns="13716" bIns="13716">
+          <a:bodyPr wrap="square" anchor="ctr" lIns="18288" rIns="18288" tIns="13716" bIns="13716">
             <a:noAutofit/>
           </a:bodyPr>
           <a:lstStyle/>
@@ -22856,8 +22936,8 @@
         </p:nvSpPr>
         <p:spPr>
           <a:xfrm>
-            <a:off x="3739896" y="2176272"/>
-            <a:ext cx="7744968" cy="1258823"/>
+            <a:off x="3739896" y="2185415"/>
+            <a:ext cx="7744968" cy="1231391"/>
           </a:xfrm>
           <a:prstGeom prst="rect">
             <a:avLst/>
@@ -22865,7 +22945,7 @@
           <a:noFill/>
         </p:spPr>
         <p:txBody>
-          <a:bodyPr wrap="square" lIns="18288" rIns="18288" tIns="13716" bIns="13716">
+          <a:bodyPr wrap="square" anchor="ctr" lIns="18288" rIns="18288" tIns="13716" bIns="13716">
             <a:noAutofit/>
           </a:bodyPr>
           <a:lstStyle/>
@@ -22955,8 +23035,8 @@
         </p:nvSpPr>
         <p:spPr>
           <a:xfrm>
-            <a:off x="694944" y="3462528"/>
-            <a:ext cx="2834640" cy="685800"/>
+            <a:off x="694944" y="3471672"/>
+            <a:ext cx="2834640" cy="1231391"/>
           </a:xfrm>
           <a:prstGeom prst="rect">
             <a:avLst/>
@@ -22964,7 +23044,7 @@
           <a:noFill/>
         </p:spPr>
         <p:txBody>
-          <a:bodyPr wrap="square" lIns="18288" rIns="18288" tIns="13716" bIns="13716">
+          <a:bodyPr wrap="square" anchor="ctr" lIns="18288" rIns="18288" tIns="13716" bIns="13716">
             <a:noAutofit/>
           </a:bodyPr>
           <a:lstStyle/>
@@ -23010,8 +23090,8 @@
         </p:nvSpPr>
         <p:spPr>
           <a:xfrm>
-            <a:off x="3739896" y="3462528"/>
-            <a:ext cx="7744968" cy="1258823"/>
+            <a:off x="3739896" y="3471672"/>
+            <a:ext cx="7744968" cy="1231391"/>
           </a:xfrm>
           <a:prstGeom prst="rect">
             <a:avLst/>
@@ -23019,7 +23099,7 @@
           <a:noFill/>
         </p:spPr>
         <p:txBody>
-          <a:bodyPr wrap="square" lIns="18288" rIns="18288" tIns="13716" bIns="13716">
+          <a:bodyPr wrap="square" anchor="ctr" lIns="18288" rIns="18288" tIns="13716" bIns="13716">
             <a:noAutofit/>
           </a:bodyPr>
           <a:lstStyle/>
@@ -23109,8 +23189,8 @@
         </p:nvSpPr>
         <p:spPr>
           <a:xfrm>
-            <a:off x="694944" y="4748783"/>
-            <a:ext cx="2834640" cy="685800"/>
+            <a:off x="694944" y="4757928"/>
+            <a:ext cx="2834640" cy="1231391"/>
           </a:xfrm>
           <a:prstGeom prst="rect">
             <a:avLst/>
@@ -23118,7 +23198,7 @@
           <a:noFill/>
         </p:spPr>
         <p:txBody>
-          <a:bodyPr wrap="square" lIns="18288" rIns="18288" tIns="13716" bIns="13716">
+          <a:bodyPr wrap="square" anchor="ctr" lIns="18288" rIns="18288" tIns="13716" bIns="13716">
             <a:noAutofit/>
           </a:bodyPr>
           <a:lstStyle/>
@@ -23164,8 +23244,8 @@
         </p:nvSpPr>
         <p:spPr>
           <a:xfrm>
-            <a:off x="3739896" y="4748783"/>
-            <a:ext cx="7744968" cy="1258823"/>
+            <a:off x="3739896" y="4757928"/>
+            <a:ext cx="7744968" cy="1231391"/>
           </a:xfrm>
           <a:prstGeom prst="rect">
             <a:avLst/>
@@ -23173,7 +23253,7 @@
           <a:noFill/>
         </p:spPr>
         <p:txBody>
-          <a:bodyPr wrap="square" lIns="18288" rIns="18288" tIns="13716" bIns="13716">
+          <a:bodyPr wrap="square" anchor="ctr" lIns="18288" rIns="18288" tIns="13716" bIns="13716">
             <a:noAutofit/>
           </a:bodyPr>
           <a:lstStyle/>
@@ -23298,7 +23378,7 @@
           <a:noFill/>
         </p:spPr>
         <p:txBody>
-          <a:bodyPr wrap="square" lIns="18288" rIns="18288" tIns="13716" bIns="13716">
+          <a:bodyPr wrap="square" anchor="t" lIns="18288" rIns="18288" tIns="13716" bIns="13716">
             <a:noAutofit/>
           </a:bodyPr>
           <a:lstStyle/>
@@ -23353,7 +23433,7 @@
           <a:noFill/>
         </p:spPr>
         <p:txBody>
-          <a:bodyPr wrap="square" lIns="18288" rIns="18288" tIns="13716" bIns="13716">
+          <a:bodyPr wrap="square" anchor="t" lIns="18288" rIns="18288" tIns="13716" bIns="13716">
             <a:noAutofit/>
           </a:bodyPr>
           <a:lstStyle/>
@@ -23408,7 +23488,7 @@
           <a:noFill/>
         </p:spPr>
         <p:txBody>
-          <a:bodyPr wrap="square" lIns="18288" rIns="18288" tIns="13716" bIns="13716">
+          <a:bodyPr wrap="square" anchor="t" lIns="18288" rIns="18288" tIns="13716" bIns="13716">
             <a:noAutofit/>
           </a:bodyPr>
           <a:lstStyle/>
@@ -23507,7 +23587,7 @@
           <a:noFill/>
         </p:spPr>
         <p:txBody>
-          <a:bodyPr wrap="square" lIns="18288" rIns="18288" tIns="13716" bIns="13716">
+          <a:bodyPr wrap="square" anchor="t" lIns="18288" rIns="18288" tIns="13716" bIns="13716">
             <a:noAutofit/>
           </a:bodyPr>
           <a:lstStyle/>
@@ -23562,7 +23642,7 @@
           <a:noFill/>
         </p:spPr>
         <p:txBody>
-          <a:bodyPr wrap="square" lIns="18288" rIns="18288" tIns="13716" bIns="13716">
+          <a:bodyPr wrap="square" anchor="t" lIns="18288" rIns="18288" tIns="13716" bIns="13716">
             <a:noAutofit/>
           </a:bodyPr>
           <a:lstStyle/>
@@ -23653,7 +23733,7 @@
         <p:spPr>
           <a:xfrm>
             <a:off x="694944" y="2185415"/>
-            <a:ext cx="411480" cy="365760"/>
+            <a:ext cx="411480" cy="1231391"/>
           </a:xfrm>
           <a:prstGeom prst="rect">
             <a:avLst/>
@@ -23661,7 +23741,7 @@
           <a:noFill/>
         </p:spPr>
         <p:txBody>
-          <a:bodyPr wrap="square" lIns="18288" rIns="18288" tIns="13716" bIns="13716">
+          <a:bodyPr wrap="square" anchor="ctr" lIns="18288" rIns="18288" tIns="13716" bIns="13716">
             <a:noAutofit/>
           </a:bodyPr>
           <a:lstStyle/>
@@ -23707,8 +23787,8 @@
         </p:nvSpPr>
         <p:spPr>
           <a:xfrm>
-            <a:off x="1216152" y="2176272"/>
-            <a:ext cx="2542032" cy="685800"/>
+            <a:off x="1216152" y="2185415"/>
+            <a:ext cx="2542032" cy="1231391"/>
           </a:xfrm>
           <a:prstGeom prst="rect">
             <a:avLst/>
@@ -23716,7 +23796,7 @@
           <a:noFill/>
         </p:spPr>
         <p:txBody>
-          <a:bodyPr wrap="square" lIns="18288" rIns="18288" tIns="13716" bIns="13716">
+          <a:bodyPr wrap="square" anchor="ctr" lIns="18288" rIns="18288" tIns="13716" bIns="13716">
             <a:noAutofit/>
           </a:bodyPr>
           <a:lstStyle/>
@@ -23762,8 +23842,8 @@
         </p:nvSpPr>
         <p:spPr>
           <a:xfrm>
-            <a:off x="3968496" y="2176272"/>
-            <a:ext cx="7516368" cy="1258823"/>
+            <a:off x="3968496" y="2185415"/>
+            <a:ext cx="7516368" cy="1231391"/>
           </a:xfrm>
           <a:prstGeom prst="rect">
             <a:avLst/>
@@ -23771,7 +23851,7 @@
           <a:noFill/>
         </p:spPr>
         <p:txBody>
-          <a:bodyPr wrap="square" lIns="18288" rIns="18288" tIns="13716" bIns="13716">
+          <a:bodyPr wrap="square" anchor="ctr" lIns="18288" rIns="18288" tIns="13716" bIns="13716">
             <a:noAutofit/>
           </a:bodyPr>
           <a:lstStyle/>
@@ -23862,7 +23942,7 @@
         <p:spPr>
           <a:xfrm>
             <a:off x="694944" y="3471672"/>
-            <a:ext cx="411480" cy="365760"/>
+            <a:ext cx="411480" cy="1231391"/>
           </a:xfrm>
           <a:prstGeom prst="rect">
             <a:avLst/>
@@ -23870,7 +23950,7 @@
           <a:noFill/>
         </p:spPr>
         <p:txBody>
-          <a:bodyPr wrap="square" lIns="18288" rIns="18288" tIns="13716" bIns="13716">
+          <a:bodyPr wrap="square" anchor="ctr" lIns="18288" rIns="18288" tIns="13716" bIns="13716">
             <a:noAutofit/>
           </a:bodyPr>
           <a:lstStyle/>
@@ -23916,8 +23996,8 @@
         </p:nvSpPr>
         <p:spPr>
           <a:xfrm>
-            <a:off x="1216152" y="3462528"/>
-            <a:ext cx="2542032" cy="685800"/>
+            <a:off x="1216152" y="3471672"/>
+            <a:ext cx="2542032" cy="1231391"/>
           </a:xfrm>
           <a:prstGeom prst="rect">
             <a:avLst/>
@@ -23925,7 +24005,7 @@
           <a:noFill/>
         </p:spPr>
         <p:txBody>
-          <a:bodyPr wrap="square" lIns="18288" rIns="18288" tIns="13716" bIns="13716">
+          <a:bodyPr wrap="square" anchor="ctr" lIns="18288" rIns="18288" tIns="13716" bIns="13716">
             <a:noAutofit/>
           </a:bodyPr>
           <a:lstStyle/>
@@ -23971,8 +24051,8 @@
         </p:nvSpPr>
         <p:spPr>
           <a:xfrm>
-            <a:off x="3968496" y="3462528"/>
-            <a:ext cx="7516368" cy="1258823"/>
+            <a:off x="3968496" y="3471672"/>
+            <a:ext cx="7516368" cy="1231391"/>
           </a:xfrm>
           <a:prstGeom prst="rect">
             <a:avLst/>
@@ -23980,7 +24060,7 @@
           <a:noFill/>
         </p:spPr>
         <p:txBody>
-          <a:bodyPr wrap="square" lIns="18288" rIns="18288" tIns="13716" bIns="13716">
+          <a:bodyPr wrap="square" anchor="ctr" lIns="18288" rIns="18288" tIns="13716" bIns="13716">
             <a:noAutofit/>
           </a:bodyPr>
           <a:lstStyle/>
@@ -24071,7 +24151,7 @@
         <p:spPr>
           <a:xfrm>
             <a:off x="694944" y="4757928"/>
-            <a:ext cx="411480" cy="365760"/>
+            <a:ext cx="411480" cy="1231391"/>
           </a:xfrm>
           <a:prstGeom prst="rect">
             <a:avLst/>
@@ -24079,7 +24159,7 @@
           <a:noFill/>
         </p:spPr>
         <p:txBody>
-          <a:bodyPr wrap="square" lIns="18288" rIns="18288" tIns="13716" bIns="13716">
+          <a:bodyPr wrap="square" anchor="ctr" lIns="18288" rIns="18288" tIns="13716" bIns="13716">
             <a:noAutofit/>
           </a:bodyPr>
           <a:lstStyle/>
@@ -24125,8 +24205,8 @@
         </p:nvSpPr>
         <p:spPr>
           <a:xfrm>
-            <a:off x="1216152" y="4748783"/>
-            <a:ext cx="2542032" cy="685800"/>
+            <a:off x="1216152" y="4757928"/>
+            <a:ext cx="2542032" cy="1231391"/>
           </a:xfrm>
           <a:prstGeom prst="rect">
             <a:avLst/>
@@ -24134,7 +24214,7 @@
           <a:noFill/>
         </p:spPr>
         <p:txBody>
-          <a:bodyPr wrap="square" lIns="18288" rIns="18288" tIns="13716" bIns="13716">
+          <a:bodyPr wrap="square" anchor="ctr" lIns="18288" rIns="18288" tIns="13716" bIns="13716">
             <a:noAutofit/>
           </a:bodyPr>
           <a:lstStyle/>
@@ -24180,8 +24260,8 @@
         </p:nvSpPr>
         <p:spPr>
           <a:xfrm>
-            <a:off x="3968496" y="4748783"/>
-            <a:ext cx="7516368" cy="1258823"/>
+            <a:off x="3968496" y="4757928"/>
+            <a:ext cx="7516368" cy="1231391"/>
           </a:xfrm>
           <a:prstGeom prst="rect">
             <a:avLst/>
@@ -24189,7 +24269,7 @@
           <a:noFill/>
         </p:spPr>
         <p:txBody>
-          <a:bodyPr wrap="square" lIns="18288" rIns="18288" tIns="13716" bIns="13716">
+          <a:bodyPr wrap="square" anchor="ctr" lIns="18288" rIns="18288" tIns="13716" bIns="13716">
             <a:noAutofit/>
           </a:bodyPr>
           <a:lstStyle/>
@@ -24314,7 +24394,7 @@
           <a:noFill/>
         </p:spPr>
         <p:txBody>
-          <a:bodyPr wrap="square" lIns="18288" rIns="18288" tIns="13716" bIns="13716">
+          <a:bodyPr wrap="square" anchor="t" lIns="18288" rIns="18288" tIns="13716" bIns="13716">
             <a:noAutofit/>
           </a:bodyPr>
           <a:lstStyle/>
@@ -24369,7 +24449,7 @@
           <a:noFill/>
         </p:spPr>
         <p:txBody>
-          <a:bodyPr wrap="square" lIns="18288" rIns="18288" tIns="13716" bIns="13716">
+          <a:bodyPr wrap="square" anchor="t" lIns="18288" rIns="18288" tIns="13716" bIns="13716">
             <a:noAutofit/>
           </a:bodyPr>
           <a:lstStyle/>
@@ -24424,7 +24504,7 @@
           <a:noFill/>
         </p:spPr>
         <p:txBody>
-          <a:bodyPr wrap="square" lIns="18288" rIns="18288" tIns="13716" bIns="13716">
+          <a:bodyPr wrap="square" anchor="t" lIns="18288" rIns="18288" tIns="13716" bIns="13716">
             <a:noAutofit/>
           </a:bodyPr>
           <a:lstStyle/>
@@ -24523,7 +24603,7 @@
           <a:noFill/>
         </p:spPr>
         <p:txBody>
-          <a:bodyPr wrap="square" lIns="18288" rIns="18288" tIns="13716" bIns="13716">
+          <a:bodyPr wrap="square" anchor="t" lIns="18288" rIns="18288" tIns="13716" bIns="13716">
             <a:noAutofit/>
           </a:bodyPr>
           <a:lstStyle/>
@@ -24578,7 +24658,7 @@
           <a:noFill/>
         </p:spPr>
         <p:txBody>
-          <a:bodyPr wrap="square" lIns="18288" rIns="18288" tIns="13716" bIns="13716">
+          <a:bodyPr wrap="square" anchor="t" lIns="18288" rIns="18288" tIns="13716" bIns="13716">
             <a:noAutofit/>
           </a:bodyPr>
           <a:lstStyle/>
@@ -24723,7 +24803,7 @@
           <a:noFill/>
         </p:spPr>
         <p:txBody>
-          <a:bodyPr wrap="square" lIns="18288" rIns="18288" tIns="13716" bIns="13716">
+          <a:bodyPr wrap="square" anchor="t" lIns="18288" rIns="18288" tIns="13716" bIns="13716">
             <a:noAutofit/>
           </a:bodyPr>
           <a:lstStyle/>
@@ -24778,7 +24858,7 @@
           <a:noFill/>
         </p:spPr>
         <p:txBody>
-          <a:bodyPr wrap="square" lIns="18288" rIns="18288" tIns="13716" bIns="13716">
+          <a:bodyPr wrap="square" anchor="t" lIns="18288" rIns="18288" tIns="13716" bIns="13716">
             <a:noAutofit/>
           </a:bodyPr>
           <a:lstStyle/>
@@ -24833,7 +24913,7 @@
           <a:noFill/>
         </p:spPr>
         <p:txBody>
-          <a:bodyPr wrap="square" lIns="18288" rIns="18288" tIns="13716" bIns="13716">
+          <a:bodyPr wrap="square" anchor="t" lIns="18288" rIns="18288" tIns="13716" bIns="13716">
             <a:noAutofit/>
           </a:bodyPr>
           <a:lstStyle/>
@@ -24978,7 +25058,7 @@
           <a:noFill/>
         </p:spPr>
         <p:txBody>
-          <a:bodyPr wrap="square" lIns="18288" rIns="18288" tIns="13716" bIns="13716">
+          <a:bodyPr wrap="square" anchor="t" lIns="18288" rIns="18288" tIns="13716" bIns="13716">
             <a:noAutofit/>
           </a:bodyPr>
           <a:lstStyle/>
@@ -25033,7 +25113,7 @@
           <a:noFill/>
         </p:spPr>
         <p:txBody>
-          <a:bodyPr wrap="square" lIns="18288" rIns="18288" tIns="13716" bIns="13716">
+          <a:bodyPr wrap="square" anchor="t" lIns="18288" rIns="18288" tIns="13716" bIns="13716">
             <a:noAutofit/>
           </a:bodyPr>
           <a:lstStyle/>
@@ -25088,7 +25168,7 @@
           <a:noFill/>
         </p:spPr>
         <p:txBody>
-          <a:bodyPr wrap="square" lIns="18288" rIns="18288" tIns="13716" bIns="13716">
+          <a:bodyPr wrap="square" anchor="t" lIns="18288" rIns="18288" tIns="13716" bIns="13716">
             <a:noAutofit/>
           </a:bodyPr>
           <a:lstStyle/>
@@ -25233,7 +25313,7 @@
           <a:noFill/>
         </p:spPr>
         <p:txBody>
-          <a:bodyPr wrap="square" lIns="18288" rIns="18288" tIns="13716" bIns="13716">
+          <a:bodyPr wrap="square" anchor="t" lIns="18288" rIns="18288" tIns="13716" bIns="13716">
             <a:noAutofit/>
           </a:bodyPr>
           <a:lstStyle/>
@@ -25288,7 +25368,7 @@
           <a:noFill/>
         </p:spPr>
         <p:txBody>
-          <a:bodyPr wrap="square" lIns="18288" rIns="18288" tIns="13716" bIns="13716">
+          <a:bodyPr wrap="square" anchor="t" lIns="18288" rIns="18288" tIns="13716" bIns="13716">
             <a:noAutofit/>
           </a:bodyPr>
           <a:lstStyle/>
@@ -25343,7 +25423,7 @@
           <a:noFill/>
         </p:spPr>
         <p:txBody>
-          <a:bodyPr wrap="square" lIns="18288" rIns="18288" tIns="13716" bIns="13716">
+          <a:bodyPr wrap="square" anchor="t" lIns="18288" rIns="18288" tIns="13716" bIns="13716">
             <a:noAutofit/>
           </a:bodyPr>
           <a:lstStyle/>
@@ -25468,7 +25548,7 @@
           <a:noFill/>
         </p:spPr>
         <p:txBody>
-          <a:bodyPr wrap="square" lIns="18288" rIns="18288" tIns="13716" bIns="13716">
+          <a:bodyPr wrap="square" anchor="t" lIns="18288" rIns="18288" tIns="13716" bIns="13716">
             <a:noAutofit/>
           </a:bodyPr>
           <a:lstStyle/>
@@ -25523,7 +25603,7 @@
           <a:noFill/>
         </p:spPr>
         <p:txBody>
-          <a:bodyPr wrap="square" lIns="18288" rIns="18288" tIns="13716" bIns="13716">
+          <a:bodyPr wrap="square" anchor="t" lIns="18288" rIns="18288" tIns="13716" bIns="13716">
             <a:noAutofit/>
           </a:bodyPr>
           <a:lstStyle/>
@@ -25578,7 +25658,7 @@
           <a:noFill/>
         </p:spPr>
         <p:txBody>
-          <a:bodyPr wrap="square" lIns="18288" rIns="18288" tIns="13716" bIns="13716">
+          <a:bodyPr wrap="square" anchor="t" lIns="18288" rIns="18288" tIns="13716" bIns="13716">
             <a:noAutofit/>
           </a:bodyPr>
           <a:lstStyle/>
@@ -25677,7 +25757,7 @@
           <a:noFill/>
         </p:spPr>
         <p:txBody>
-          <a:bodyPr wrap="square" lIns="18288" rIns="18288" tIns="13716" bIns="13716">
+          <a:bodyPr wrap="square" anchor="t" lIns="18288" rIns="18288" tIns="13716" bIns="13716">
             <a:noAutofit/>
           </a:bodyPr>
           <a:lstStyle/>
@@ -25732,7 +25812,7 @@
           <a:noFill/>
         </p:spPr>
         <p:txBody>
-          <a:bodyPr wrap="square" lIns="18288" rIns="18288" tIns="13716" bIns="13716">
+          <a:bodyPr wrap="square" anchor="t" lIns="18288" rIns="18288" tIns="13716" bIns="13716">
             <a:noAutofit/>
           </a:bodyPr>
           <a:lstStyle/>
@@ -25822,8 +25902,8 @@
         </p:nvSpPr>
         <p:spPr>
           <a:xfrm>
-            <a:off x="685800" y="2130552"/>
-            <a:ext cx="2834640" cy="685800"/>
+            <a:off x="685800" y="2139696"/>
+            <a:ext cx="2834640" cy="1249680"/>
           </a:xfrm>
           <a:prstGeom prst="rect">
             <a:avLst/>
@@ -25831,7 +25911,7 @@
           <a:noFill/>
         </p:spPr>
         <p:txBody>
-          <a:bodyPr wrap="square" lIns="18288" rIns="18288" tIns="13716" bIns="13716">
+          <a:bodyPr wrap="square" anchor="ctr" lIns="18288" rIns="18288" tIns="13716" bIns="13716">
             <a:noAutofit/>
           </a:bodyPr>
           <a:lstStyle/>
@@ -25877,7 +25957,7 @@
         </p:nvSpPr>
         <p:spPr>
           <a:xfrm>
-            <a:off x="3730752" y="2130552"/>
+            <a:off x="3730752" y="2263648"/>
             <a:ext cx="7790688" cy="617728"/>
           </a:xfrm>
           <a:prstGeom prst="rect">
@@ -25886,7 +25966,7 @@
           <a:noFill/>
         </p:spPr>
         <p:txBody>
-          <a:bodyPr wrap="square" lIns="18288" rIns="18288" tIns="13716" bIns="13716">
+          <a:bodyPr wrap="square" anchor="t" lIns="18288" rIns="18288" tIns="13716" bIns="13716">
             <a:noAutofit/>
           </a:bodyPr>
           <a:lstStyle/>
@@ -25932,7 +26012,7 @@
         </p:nvSpPr>
         <p:spPr>
           <a:xfrm>
-            <a:off x="3730752" y="2839720"/>
+            <a:off x="3730752" y="2972816"/>
             <a:ext cx="7790688" cy="292608"/>
           </a:xfrm>
           <a:prstGeom prst="rect">
@@ -25941,7 +26021,7 @@
           <a:noFill/>
         </p:spPr>
         <p:txBody>
-          <a:bodyPr wrap="square" lIns="18288" rIns="18288" tIns="13716" bIns="13716">
+          <a:bodyPr wrap="square" anchor="t" lIns="18288" rIns="18288" tIns="13716" bIns="13716">
             <a:noAutofit/>
           </a:bodyPr>
           <a:lstStyle/>
@@ -26031,8 +26111,8 @@
         </p:nvSpPr>
         <p:spPr>
           <a:xfrm>
-            <a:off x="685800" y="3435096"/>
-            <a:ext cx="2834640" cy="685800"/>
+            <a:off x="685800" y="3444240"/>
+            <a:ext cx="2834640" cy="1249680"/>
           </a:xfrm>
           <a:prstGeom prst="rect">
             <a:avLst/>
@@ -26040,7 +26120,7 @@
           <a:noFill/>
         </p:spPr>
         <p:txBody>
-          <a:bodyPr wrap="square" lIns="18288" rIns="18288" tIns="13716" bIns="13716">
+          <a:bodyPr wrap="square" anchor="ctr" lIns="18288" rIns="18288" tIns="13716" bIns="13716">
             <a:noAutofit/>
           </a:bodyPr>
           <a:lstStyle/>
@@ -26086,7 +26166,7 @@
         </p:nvSpPr>
         <p:spPr>
           <a:xfrm>
-            <a:off x="3730752" y="3435096"/>
+            <a:off x="3730752" y="3568192"/>
             <a:ext cx="7790688" cy="617728"/>
           </a:xfrm>
           <a:prstGeom prst="rect">
@@ -26095,7 +26175,7 @@
           <a:noFill/>
         </p:spPr>
         <p:txBody>
-          <a:bodyPr wrap="square" lIns="18288" rIns="18288" tIns="13716" bIns="13716">
+          <a:bodyPr wrap="square" anchor="t" lIns="18288" rIns="18288" tIns="13716" bIns="13716">
             <a:noAutofit/>
           </a:bodyPr>
           <a:lstStyle/>
@@ -26141,7 +26221,7 @@
         </p:nvSpPr>
         <p:spPr>
           <a:xfrm>
-            <a:off x="3730752" y="4144264"/>
+            <a:off x="3730752" y="4277360"/>
             <a:ext cx="7790688" cy="292608"/>
           </a:xfrm>
           <a:prstGeom prst="rect">
@@ -26150,7 +26230,7 @@
           <a:noFill/>
         </p:spPr>
         <p:txBody>
-          <a:bodyPr wrap="square" lIns="18288" rIns="18288" tIns="13716" bIns="13716">
+          <a:bodyPr wrap="square" anchor="t" lIns="18288" rIns="18288" tIns="13716" bIns="13716">
             <a:noAutofit/>
           </a:bodyPr>
           <a:lstStyle/>
@@ -26240,8 +26320,8 @@
         </p:nvSpPr>
         <p:spPr>
           <a:xfrm>
-            <a:off x="685800" y="4739640"/>
-            <a:ext cx="2834640" cy="685800"/>
+            <a:off x="685800" y="4748784"/>
+            <a:ext cx="2834640" cy="1249680"/>
           </a:xfrm>
           <a:prstGeom prst="rect">
             <a:avLst/>
@@ -26249,7 +26329,7 @@
           <a:noFill/>
         </p:spPr>
         <p:txBody>
-          <a:bodyPr wrap="square" lIns="18288" rIns="18288" tIns="13716" bIns="13716">
+          <a:bodyPr wrap="square" anchor="ctr" lIns="18288" rIns="18288" tIns="13716" bIns="13716">
             <a:noAutofit/>
           </a:bodyPr>
           <a:lstStyle/>
@@ -26295,7 +26375,7 @@
         </p:nvSpPr>
         <p:spPr>
           <a:xfrm>
-            <a:off x="3730752" y="4739640"/>
+            <a:off x="3730752" y="4872736"/>
             <a:ext cx="7790688" cy="617728"/>
           </a:xfrm>
           <a:prstGeom prst="rect">
@@ -26304,7 +26384,7 @@
           <a:noFill/>
         </p:spPr>
         <p:txBody>
-          <a:bodyPr wrap="square" lIns="18288" rIns="18288" tIns="13716" bIns="13716">
+          <a:bodyPr wrap="square" anchor="t" lIns="18288" rIns="18288" tIns="13716" bIns="13716">
             <a:noAutofit/>
           </a:bodyPr>
           <a:lstStyle/>
@@ -26350,7 +26430,7 @@
         </p:nvSpPr>
         <p:spPr>
           <a:xfrm>
-            <a:off x="3730752" y="5448808"/>
+            <a:off x="3730752" y="5581904"/>
             <a:ext cx="7790688" cy="292608"/>
           </a:xfrm>
           <a:prstGeom prst="rect">
@@ -26359,7 +26439,7 @@
           <a:noFill/>
         </p:spPr>
         <p:txBody>
-          <a:bodyPr wrap="square" lIns="18288" rIns="18288" tIns="13716" bIns="13716">
+          <a:bodyPr wrap="square" anchor="t" lIns="18288" rIns="18288" tIns="13716" bIns="13716">
             <a:noAutofit/>
           </a:bodyPr>
           <a:lstStyle/>
@@ -26484,7 +26564,7 @@
           <a:noFill/>
         </p:spPr>
         <p:txBody>
-          <a:bodyPr wrap="square" lIns="18288" rIns="18288" tIns="13716" bIns="13716">
+          <a:bodyPr wrap="square" anchor="t" lIns="18288" rIns="18288" tIns="13716" bIns="13716">
             <a:noAutofit/>
           </a:bodyPr>
           <a:lstStyle/>
@@ -26539,7 +26619,7 @@
           <a:noFill/>
         </p:spPr>
         <p:txBody>
-          <a:bodyPr wrap="square" lIns="18288" rIns="18288" tIns="13716" bIns="13716">
+          <a:bodyPr wrap="square" anchor="t" lIns="18288" rIns="18288" tIns="13716" bIns="13716">
             <a:noAutofit/>
           </a:bodyPr>
           <a:lstStyle/>
@@ -26594,7 +26674,7 @@
           <a:noFill/>
         </p:spPr>
         <p:txBody>
-          <a:bodyPr wrap="square" lIns="18288" rIns="18288" tIns="13716" bIns="13716">
+          <a:bodyPr wrap="square" anchor="t" lIns="18288" rIns="18288" tIns="13716" bIns="13716">
             <a:noAutofit/>
           </a:bodyPr>
           <a:lstStyle/>
@@ -26693,7 +26773,7 @@
           <a:noFill/>
         </p:spPr>
         <p:txBody>
-          <a:bodyPr wrap="square" lIns="18288" rIns="18288" tIns="13716" bIns="13716">
+          <a:bodyPr wrap="square" anchor="t" lIns="18288" rIns="18288" tIns="13716" bIns="13716">
             <a:noAutofit/>
           </a:bodyPr>
           <a:lstStyle/>
@@ -26748,7 +26828,7 @@
           <a:noFill/>
         </p:spPr>
         <p:txBody>
-          <a:bodyPr wrap="square" lIns="18288" rIns="18288" tIns="13716" bIns="13716">
+          <a:bodyPr wrap="square" anchor="t" lIns="18288" rIns="18288" tIns="13716" bIns="13716">
             <a:noAutofit/>
           </a:bodyPr>
           <a:lstStyle/>
@@ -26893,7 +26973,7 @@
           <a:noFill/>
         </p:spPr>
         <p:txBody>
-          <a:bodyPr wrap="square" lIns="18288" rIns="18288" tIns="13716" bIns="13716">
+          <a:bodyPr wrap="square" anchor="t" lIns="18288" rIns="18288" tIns="13716" bIns="13716">
             <a:noAutofit/>
           </a:bodyPr>
           <a:lstStyle/>
@@ -26948,7 +27028,7 @@
           <a:noFill/>
         </p:spPr>
         <p:txBody>
-          <a:bodyPr wrap="square" lIns="18288" rIns="18288" tIns="13716" bIns="13716">
+          <a:bodyPr wrap="square" anchor="t" lIns="18288" rIns="18288" tIns="13716" bIns="13716">
             <a:noAutofit/>
           </a:bodyPr>
           <a:lstStyle/>
@@ -27003,7 +27083,7 @@
           <a:noFill/>
         </p:spPr>
         <p:txBody>
-          <a:bodyPr wrap="square" lIns="18288" rIns="18288" tIns="13716" bIns="13716">
+          <a:bodyPr wrap="square" anchor="t" lIns="18288" rIns="18288" tIns="13716" bIns="13716">
             <a:noAutofit/>
           </a:bodyPr>
           <a:lstStyle/>
@@ -27148,7 +27228,7 @@
           <a:noFill/>
         </p:spPr>
         <p:txBody>
-          <a:bodyPr wrap="square" lIns="18288" rIns="18288" tIns="13716" bIns="13716">
+          <a:bodyPr wrap="square" anchor="t" lIns="18288" rIns="18288" tIns="13716" bIns="13716">
             <a:noAutofit/>
           </a:bodyPr>
           <a:lstStyle/>
@@ -27203,7 +27283,7 @@
           <a:noFill/>
         </p:spPr>
         <p:txBody>
-          <a:bodyPr wrap="square" lIns="18288" rIns="18288" tIns="13716" bIns="13716">
+          <a:bodyPr wrap="square" anchor="t" lIns="18288" rIns="18288" tIns="13716" bIns="13716">
             <a:noAutofit/>
           </a:bodyPr>
           <a:lstStyle/>
@@ -27258,7 +27338,7 @@
           <a:noFill/>
         </p:spPr>
         <p:txBody>
-          <a:bodyPr wrap="square" lIns="18288" rIns="18288" tIns="13716" bIns="13716">
+          <a:bodyPr wrap="square" anchor="t" lIns="18288" rIns="18288" tIns="13716" bIns="13716">
             <a:noAutofit/>
           </a:bodyPr>
           <a:lstStyle/>
@@ -27403,7 +27483,7 @@
           <a:noFill/>
         </p:spPr>
         <p:txBody>
-          <a:bodyPr wrap="square" lIns="18288" rIns="18288" tIns="13716" bIns="13716">
+          <a:bodyPr wrap="square" anchor="t" lIns="18288" rIns="18288" tIns="13716" bIns="13716">
             <a:noAutofit/>
           </a:bodyPr>
           <a:lstStyle/>
@@ -27458,7 +27538,7 @@
           <a:noFill/>
         </p:spPr>
         <p:txBody>
-          <a:bodyPr wrap="square" lIns="18288" rIns="18288" tIns="13716" bIns="13716">
+          <a:bodyPr wrap="square" anchor="t" lIns="18288" rIns="18288" tIns="13716" bIns="13716">
             <a:noAutofit/>
           </a:bodyPr>
           <a:lstStyle/>
@@ -27513,7 +27593,7 @@
           <a:noFill/>
         </p:spPr>
         <p:txBody>
-          <a:bodyPr wrap="square" lIns="18288" rIns="18288" tIns="13716" bIns="13716">
+          <a:bodyPr wrap="square" anchor="t" lIns="18288" rIns="18288" tIns="13716" bIns="13716">
             <a:noAutofit/>
           </a:bodyPr>
           <a:lstStyle/>
@@ -27638,7 +27718,7 @@
           <a:noFill/>
         </p:spPr>
         <p:txBody>
-          <a:bodyPr wrap="square" lIns="18288" rIns="18288" tIns="13716" bIns="13716">
+          <a:bodyPr wrap="square" anchor="t" lIns="18288" rIns="18288" tIns="13716" bIns="13716">
             <a:noAutofit/>
           </a:bodyPr>
           <a:lstStyle/>
@@ -27693,7 +27773,7 @@
           <a:noFill/>
         </p:spPr>
         <p:txBody>
-          <a:bodyPr wrap="square" lIns="18288" rIns="18288" tIns="13716" bIns="13716">
+          <a:bodyPr wrap="square" anchor="t" lIns="18288" rIns="18288" tIns="13716" bIns="13716">
             <a:noAutofit/>
           </a:bodyPr>
           <a:lstStyle/>
@@ -27748,7 +27828,7 @@
           <a:noFill/>
         </p:spPr>
         <p:txBody>
-          <a:bodyPr wrap="square" lIns="18288" rIns="18288" tIns="13716" bIns="13716">
+          <a:bodyPr wrap="square" anchor="t" lIns="18288" rIns="18288" tIns="13716" bIns="13716">
             <a:noAutofit/>
           </a:bodyPr>
           <a:lstStyle/>
@@ -27847,7 +27927,7 @@
           <a:noFill/>
         </p:spPr>
         <p:txBody>
-          <a:bodyPr wrap="square" lIns="18288" rIns="18288" tIns="13716" bIns="13716">
+          <a:bodyPr wrap="square" anchor="t" lIns="18288" rIns="18288" tIns="13716" bIns="13716">
             <a:noAutofit/>
           </a:bodyPr>
           <a:lstStyle/>
@@ -27902,7 +27982,7 @@
           <a:noFill/>
         </p:spPr>
         <p:txBody>
-          <a:bodyPr wrap="square" lIns="18288" rIns="18288" tIns="13716" bIns="13716">
+          <a:bodyPr wrap="square" anchor="t" lIns="18288" rIns="18288" tIns="13716" bIns="13716">
             <a:noAutofit/>
           </a:bodyPr>
           <a:lstStyle/>
@@ -27992,8 +28072,8 @@
         </p:nvSpPr>
         <p:spPr>
           <a:xfrm>
-            <a:off x="685800" y="2130552"/>
-            <a:ext cx="2834640" cy="685800"/>
+            <a:off x="685800" y="2139696"/>
+            <a:ext cx="2834640" cy="1249680"/>
           </a:xfrm>
           <a:prstGeom prst="rect">
             <a:avLst/>
@@ -28001,7 +28081,7 @@
           <a:noFill/>
         </p:spPr>
         <p:txBody>
-          <a:bodyPr wrap="square" lIns="18288" rIns="18288" tIns="13716" bIns="13716">
+          <a:bodyPr wrap="square" anchor="ctr" lIns="18288" rIns="18288" tIns="13716" bIns="13716">
             <a:noAutofit/>
           </a:bodyPr>
           <a:lstStyle/>
@@ -28047,7 +28127,7 @@
         </p:nvSpPr>
         <p:spPr>
           <a:xfrm>
-            <a:off x="3730752" y="2130552"/>
+            <a:off x="3730752" y="2263648"/>
             <a:ext cx="7790688" cy="617728"/>
           </a:xfrm>
           <a:prstGeom prst="rect">
@@ -28056,7 +28136,7 @@
           <a:noFill/>
         </p:spPr>
         <p:txBody>
-          <a:bodyPr wrap="square" lIns="18288" rIns="18288" tIns="13716" bIns="13716">
+          <a:bodyPr wrap="square" anchor="t" lIns="18288" rIns="18288" tIns="13716" bIns="13716">
             <a:noAutofit/>
           </a:bodyPr>
           <a:lstStyle/>
@@ -28102,7 +28182,7 @@
         </p:nvSpPr>
         <p:spPr>
           <a:xfrm>
-            <a:off x="3730752" y="2839720"/>
+            <a:off x="3730752" y="2972816"/>
             <a:ext cx="7790688" cy="292608"/>
           </a:xfrm>
           <a:prstGeom prst="rect">
@@ -28111,7 +28191,7 @@
           <a:noFill/>
         </p:spPr>
         <p:txBody>
-          <a:bodyPr wrap="square" lIns="18288" rIns="18288" tIns="13716" bIns="13716">
+          <a:bodyPr wrap="square" anchor="t" lIns="18288" rIns="18288" tIns="13716" bIns="13716">
             <a:noAutofit/>
           </a:bodyPr>
           <a:lstStyle/>
@@ -28201,8 +28281,8 @@
         </p:nvSpPr>
         <p:spPr>
           <a:xfrm>
-            <a:off x="685800" y="3435096"/>
-            <a:ext cx="2834640" cy="685800"/>
+            <a:off x="685800" y="3444240"/>
+            <a:ext cx="2834640" cy="1249680"/>
           </a:xfrm>
           <a:prstGeom prst="rect">
             <a:avLst/>
@@ -28210,7 +28290,7 @@
           <a:noFill/>
         </p:spPr>
         <p:txBody>
-          <a:bodyPr wrap="square" lIns="18288" rIns="18288" tIns="13716" bIns="13716">
+          <a:bodyPr wrap="square" anchor="ctr" lIns="18288" rIns="18288" tIns="13716" bIns="13716">
             <a:noAutofit/>
           </a:bodyPr>
           <a:lstStyle/>
@@ -28256,7 +28336,7 @@
         </p:nvSpPr>
         <p:spPr>
           <a:xfrm>
-            <a:off x="3730752" y="3435096"/>
+            <a:off x="3730752" y="3568192"/>
             <a:ext cx="7790688" cy="617728"/>
           </a:xfrm>
           <a:prstGeom prst="rect">
@@ -28265,7 +28345,7 @@
           <a:noFill/>
         </p:spPr>
         <p:txBody>
-          <a:bodyPr wrap="square" lIns="18288" rIns="18288" tIns="13716" bIns="13716">
+          <a:bodyPr wrap="square" anchor="t" lIns="18288" rIns="18288" tIns="13716" bIns="13716">
             <a:noAutofit/>
           </a:bodyPr>
           <a:lstStyle/>
@@ -28311,7 +28391,7 @@
         </p:nvSpPr>
         <p:spPr>
           <a:xfrm>
-            <a:off x="3730752" y="4144264"/>
+            <a:off x="3730752" y="4277360"/>
             <a:ext cx="7790688" cy="292608"/>
           </a:xfrm>
           <a:prstGeom prst="rect">
@@ -28320,7 +28400,7 @@
           <a:noFill/>
         </p:spPr>
         <p:txBody>
-          <a:bodyPr wrap="square" lIns="18288" rIns="18288" tIns="13716" bIns="13716">
+          <a:bodyPr wrap="square" anchor="t" lIns="18288" rIns="18288" tIns="13716" bIns="13716">
             <a:noAutofit/>
           </a:bodyPr>
           <a:lstStyle/>
@@ -28410,8 +28490,8 @@
         </p:nvSpPr>
         <p:spPr>
           <a:xfrm>
-            <a:off x="685800" y="4739640"/>
-            <a:ext cx="2834640" cy="685800"/>
+            <a:off x="685800" y="4748784"/>
+            <a:ext cx="2834640" cy="1249680"/>
           </a:xfrm>
           <a:prstGeom prst="rect">
             <a:avLst/>
@@ -28419,7 +28499,7 @@
           <a:noFill/>
         </p:spPr>
         <p:txBody>
-          <a:bodyPr wrap="square" lIns="18288" rIns="18288" tIns="13716" bIns="13716">
+          <a:bodyPr wrap="square" anchor="ctr" lIns="18288" rIns="18288" tIns="13716" bIns="13716">
             <a:noAutofit/>
           </a:bodyPr>
           <a:lstStyle/>
@@ -28465,7 +28545,7 @@
         </p:nvSpPr>
         <p:spPr>
           <a:xfrm>
-            <a:off x="3730752" y="4739640"/>
+            <a:off x="3730752" y="4872736"/>
             <a:ext cx="7790688" cy="617728"/>
           </a:xfrm>
           <a:prstGeom prst="rect">
@@ -28474,7 +28554,7 @@
           <a:noFill/>
         </p:spPr>
         <p:txBody>
-          <a:bodyPr wrap="square" lIns="18288" rIns="18288" tIns="13716" bIns="13716">
+          <a:bodyPr wrap="square" anchor="t" lIns="18288" rIns="18288" tIns="13716" bIns="13716">
             <a:noAutofit/>
           </a:bodyPr>
           <a:lstStyle/>
@@ -28520,7 +28600,7 @@
         </p:nvSpPr>
         <p:spPr>
           <a:xfrm>
-            <a:off x="3730752" y="5448808"/>
+            <a:off x="3730752" y="5581904"/>
             <a:ext cx="7790688" cy="292608"/>
           </a:xfrm>
           <a:prstGeom prst="rect">
@@ -28529,7 +28609,7 @@
           <a:noFill/>
         </p:spPr>
         <p:txBody>
-          <a:bodyPr wrap="square" lIns="18288" rIns="18288" tIns="13716" bIns="13716">
+          <a:bodyPr wrap="square" anchor="t" lIns="18288" rIns="18288" tIns="13716" bIns="13716">
             <a:noAutofit/>
           </a:bodyPr>
           <a:lstStyle/>
@@ -28654,7 +28734,7 @@
           <a:noFill/>
         </p:spPr>
         <p:txBody>
-          <a:bodyPr wrap="square" lIns="18288" rIns="18288" tIns="13716" bIns="13716">
+          <a:bodyPr wrap="square" anchor="t" lIns="18288" rIns="18288" tIns="13716" bIns="13716">
             <a:noAutofit/>
           </a:bodyPr>
           <a:lstStyle/>
@@ -28709,7 +28789,7 @@
           <a:noFill/>
         </p:spPr>
         <p:txBody>
-          <a:bodyPr wrap="square" lIns="18288" rIns="18288" tIns="13716" bIns="13716">
+          <a:bodyPr wrap="square" anchor="t" lIns="18288" rIns="18288" tIns="13716" bIns="13716">
             <a:noAutofit/>
           </a:bodyPr>
           <a:lstStyle/>
@@ -28764,7 +28844,7 @@
           <a:noFill/>
         </p:spPr>
         <p:txBody>
-          <a:bodyPr wrap="square" lIns="18288" rIns="18288" tIns="13716" bIns="13716">
+          <a:bodyPr wrap="square" anchor="t" lIns="18288" rIns="18288" tIns="13716" bIns="13716">
             <a:noAutofit/>
           </a:bodyPr>
           <a:lstStyle/>
@@ -28863,7 +28943,7 @@
           <a:noFill/>
         </p:spPr>
         <p:txBody>
-          <a:bodyPr wrap="square" lIns="18288" rIns="18288" tIns="13716" bIns="13716">
+          <a:bodyPr wrap="square" anchor="t" lIns="18288" rIns="18288" tIns="13716" bIns="13716">
             <a:noAutofit/>
           </a:bodyPr>
           <a:lstStyle/>
@@ -28918,7 +28998,7 @@
           <a:noFill/>
         </p:spPr>
         <p:txBody>
-          <a:bodyPr wrap="square" lIns="18288" rIns="18288" tIns="13716" bIns="13716">
+          <a:bodyPr wrap="square" anchor="t" lIns="18288" rIns="18288" tIns="13716" bIns="13716">
             <a:noAutofit/>
           </a:bodyPr>
           <a:lstStyle/>
@@ -29063,7 +29143,7 @@
           <a:noFill/>
         </p:spPr>
         <p:txBody>
-          <a:bodyPr wrap="square" lIns="18288" rIns="18288" tIns="13716" bIns="13716">
+          <a:bodyPr wrap="square" anchor="t" lIns="18288" rIns="18288" tIns="13716" bIns="13716">
             <a:noAutofit/>
           </a:bodyPr>
           <a:lstStyle/>
@@ -29118,7 +29198,7 @@
           <a:noFill/>
         </p:spPr>
         <p:txBody>
-          <a:bodyPr wrap="square" lIns="18288" rIns="18288" tIns="13716" bIns="13716">
+          <a:bodyPr wrap="square" anchor="t" lIns="18288" rIns="18288" tIns="13716" bIns="13716">
             <a:noAutofit/>
           </a:bodyPr>
           <a:lstStyle/>
@@ -29173,7 +29253,7 @@
           <a:noFill/>
         </p:spPr>
         <p:txBody>
-          <a:bodyPr wrap="square" lIns="18288" rIns="18288" tIns="13716" bIns="13716">
+          <a:bodyPr wrap="square" anchor="t" lIns="18288" rIns="18288" tIns="13716" bIns="13716">
             <a:noAutofit/>
           </a:bodyPr>
           <a:lstStyle/>
@@ -29318,7 +29398,7 @@
           <a:noFill/>
         </p:spPr>
         <p:txBody>
-          <a:bodyPr wrap="square" lIns="18288" rIns="18288" tIns="13716" bIns="13716">
+          <a:bodyPr wrap="square" anchor="t" lIns="18288" rIns="18288" tIns="13716" bIns="13716">
             <a:noAutofit/>
           </a:bodyPr>
           <a:lstStyle/>
@@ -29373,7 +29453,7 @@
           <a:noFill/>
         </p:spPr>
         <p:txBody>
-          <a:bodyPr wrap="square" lIns="18288" rIns="18288" tIns="13716" bIns="13716">
+          <a:bodyPr wrap="square" anchor="t" lIns="18288" rIns="18288" tIns="13716" bIns="13716">
             <a:noAutofit/>
           </a:bodyPr>
           <a:lstStyle/>
@@ -29428,7 +29508,7 @@
           <a:noFill/>
         </p:spPr>
         <p:txBody>
-          <a:bodyPr wrap="square" lIns="18288" rIns="18288" tIns="13716" bIns="13716">
+          <a:bodyPr wrap="square" anchor="t" lIns="18288" rIns="18288" tIns="13716" bIns="13716">
             <a:noAutofit/>
           </a:bodyPr>
           <a:lstStyle/>
@@ -29573,7 +29653,7 @@
           <a:noFill/>
         </p:spPr>
         <p:txBody>
-          <a:bodyPr wrap="square" lIns="18288" rIns="18288" tIns="13716" bIns="13716">
+          <a:bodyPr wrap="square" anchor="t" lIns="18288" rIns="18288" tIns="13716" bIns="13716">
             <a:noAutofit/>
           </a:bodyPr>
           <a:lstStyle/>
@@ -29628,7 +29708,7 @@
           <a:noFill/>
         </p:spPr>
         <p:txBody>
-          <a:bodyPr wrap="square" lIns="18288" rIns="18288" tIns="13716" bIns="13716">
+          <a:bodyPr wrap="square" anchor="t" lIns="18288" rIns="18288" tIns="13716" bIns="13716">
             <a:noAutofit/>
           </a:bodyPr>
           <a:lstStyle/>
@@ -29683,7 +29763,7 @@
           <a:noFill/>
         </p:spPr>
         <p:txBody>
-          <a:bodyPr wrap="square" lIns="18288" rIns="18288" tIns="13716" bIns="13716">
+          <a:bodyPr wrap="square" anchor="t" lIns="18288" rIns="18288" tIns="13716" bIns="13716">
             <a:noAutofit/>
           </a:bodyPr>
           <a:lstStyle/>
@@ -29828,7 +29908,7 @@
           <a:noFill/>
         </p:spPr>
         <p:txBody>
-          <a:bodyPr wrap="square" lIns="18288" rIns="18288" tIns="13716" bIns="13716">
+          <a:bodyPr wrap="square" anchor="t" lIns="18288" rIns="18288" tIns="13716" bIns="13716">
             <a:noAutofit/>
           </a:bodyPr>
           <a:lstStyle/>
@@ -29883,7 +29963,7 @@
           <a:noFill/>
         </p:spPr>
         <p:txBody>
-          <a:bodyPr wrap="square" lIns="18288" rIns="18288" tIns="13716" bIns="13716">
+          <a:bodyPr wrap="square" anchor="t" lIns="18288" rIns="18288" tIns="13716" bIns="13716">
             <a:noAutofit/>
           </a:bodyPr>
           <a:lstStyle/>
@@ -29938,7 +30018,7 @@
           <a:noFill/>
         </p:spPr>
         <p:txBody>
-          <a:bodyPr wrap="square" lIns="18288" rIns="18288" tIns="13716" bIns="13716">
+          <a:bodyPr wrap="square" anchor="t" lIns="18288" rIns="18288" tIns="13716" bIns="13716">
             <a:noAutofit/>
           </a:bodyPr>
           <a:lstStyle/>
@@ -30083,7 +30163,7 @@
           <a:noFill/>
         </p:spPr>
         <p:txBody>
-          <a:bodyPr wrap="square" lIns="18288" rIns="18288" tIns="13716" bIns="13716">
+          <a:bodyPr wrap="square" anchor="t" lIns="18288" rIns="18288" tIns="13716" bIns="13716">
             <a:noAutofit/>
           </a:bodyPr>
           <a:lstStyle/>
@@ -30138,7 +30218,7 @@
           <a:noFill/>
         </p:spPr>
         <p:txBody>
-          <a:bodyPr wrap="square" lIns="18288" rIns="18288" tIns="13716" bIns="13716">
+          <a:bodyPr wrap="square" anchor="t" lIns="18288" rIns="18288" tIns="13716" bIns="13716">
             <a:noAutofit/>
           </a:bodyPr>
           <a:lstStyle/>
@@ -30193,7 +30273,7 @@
           <a:noFill/>
         </p:spPr>
         <p:txBody>
-          <a:bodyPr wrap="square" lIns="18288" rIns="18288" tIns="13716" bIns="13716">
+          <a:bodyPr wrap="square" anchor="t" lIns="18288" rIns="18288" tIns="13716" bIns="13716">
             <a:noAutofit/>
           </a:bodyPr>
           <a:lstStyle/>
@@ -30338,7 +30418,7 @@
           <a:noFill/>
         </p:spPr>
         <p:txBody>
-          <a:bodyPr wrap="square" lIns="18288" rIns="18288" tIns="13716" bIns="13716">
+          <a:bodyPr wrap="square" anchor="t" lIns="18288" rIns="18288" tIns="13716" bIns="13716">
             <a:noAutofit/>
           </a:bodyPr>
           <a:lstStyle/>
@@ -30393,7 +30473,7 @@
           <a:noFill/>
         </p:spPr>
         <p:txBody>
-          <a:bodyPr wrap="square" lIns="18288" rIns="18288" tIns="13716" bIns="13716">
+          <a:bodyPr wrap="square" anchor="t" lIns="18288" rIns="18288" tIns="13716" bIns="13716">
             <a:noAutofit/>
           </a:bodyPr>
           <a:lstStyle/>
@@ -30448,7 +30528,7 @@
           <a:noFill/>
         </p:spPr>
         <p:txBody>
-          <a:bodyPr wrap="square" lIns="18288" rIns="18288" tIns="13716" bIns="13716">
+          <a:bodyPr wrap="square" anchor="t" lIns="18288" rIns="18288" tIns="13716" bIns="13716">
             <a:noAutofit/>
           </a:bodyPr>
           <a:lstStyle/>
@@ -30573,7 +30653,7 @@
           <a:noFill/>
         </p:spPr>
         <p:txBody>
-          <a:bodyPr wrap="square" lIns="18288" rIns="18288" tIns="13716" bIns="13716">
+          <a:bodyPr wrap="square" anchor="t" lIns="18288" rIns="18288" tIns="13716" bIns="13716">
             <a:noAutofit/>
           </a:bodyPr>
           <a:lstStyle/>
@@ -30628,7 +30708,7 @@
           <a:noFill/>
         </p:spPr>
         <p:txBody>
-          <a:bodyPr wrap="square" lIns="18288" rIns="18288" tIns="13716" bIns="13716">
+          <a:bodyPr wrap="square" anchor="t" lIns="18288" rIns="18288" tIns="13716" bIns="13716">
             <a:noAutofit/>
           </a:bodyPr>
           <a:lstStyle/>
@@ -30683,7 +30763,7 @@
           <a:noFill/>
         </p:spPr>
         <p:txBody>
-          <a:bodyPr wrap="square" lIns="18288" rIns="18288" tIns="13716" bIns="13716">
+          <a:bodyPr wrap="square" anchor="t" lIns="18288" rIns="18288" tIns="13716" bIns="13716">
             <a:noAutofit/>
           </a:bodyPr>
           <a:lstStyle/>
@@ -30782,7 +30862,7 @@
           <a:noFill/>
         </p:spPr>
         <p:txBody>
-          <a:bodyPr wrap="square" lIns="18288" rIns="18288" tIns="13716" bIns="13716">
+          <a:bodyPr wrap="square" anchor="t" lIns="18288" rIns="18288" tIns="13716" bIns="13716">
             <a:noAutofit/>
           </a:bodyPr>
           <a:lstStyle/>
@@ -30837,7 +30917,7 @@
           <a:noFill/>
         </p:spPr>
         <p:txBody>
-          <a:bodyPr wrap="square" lIns="18288" rIns="18288" tIns="13716" bIns="13716">
+          <a:bodyPr wrap="square" anchor="t" lIns="18288" rIns="18288" tIns="13716" bIns="13716">
             <a:noAutofit/>
           </a:bodyPr>
           <a:lstStyle/>
@@ -30980,7 +31060,7 @@
           <a:noFill/>
         </p:spPr>
         <p:txBody>
-          <a:bodyPr wrap="square" lIns="18288" rIns="18288" tIns="13716" bIns="13716">
+          <a:bodyPr wrap="square" anchor="t" lIns="18288" rIns="18288" tIns="13716" bIns="13716">
             <a:noAutofit/>
           </a:bodyPr>
           <a:lstStyle/>
@@ -31035,7 +31115,7 @@
           <a:noFill/>
         </p:spPr>
         <p:txBody>
-          <a:bodyPr wrap="square" lIns="18288" rIns="18288" tIns="13716" bIns="13716">
+          <a:bodyPr wrap="square" anchor="t" lIns="18288" rIns="18288" tIns="13716" bIns="13716">
             <a:noAutofit/>
           </a:bodyPr>
           <a:lstStyle/>
@@ -31090,7 +31170,7 @@
           <a:noFill/>
         </p:spPr>
         <p:txBody>
-          <a:bodyPr wrap="square" lIns="18288" rIns="18288" tIns="13716" bIns="13716">
+          <a:bodyPr wrap="square" anchor="t" lIns="18288" rIns="18288" tIns="13716" bIns="13716">
             <a:noAutofit/>
           </a:bodyPr>
           <a:lstStyle/>
@@ -31189,7 +31269,7 @@
           <a:noFill/>
         </p:spPr>
         <p:txBody>
-          <a:bodyPr wrap="square" lIns="18288" rIns="18288" tIns="13716" bIns="13716">
+          <a:bodyPr wrap="square" anchor="t" lIns="18288" rIns="18288" tIns="13716" bIns="13716">
             <a:noAutofit/>
           </a:bodyPr>
           <a:lstStyle/>
@@ -31244,7 +31324,7 @@
           <a:noFill/>
         </p:spPr>
         <p:txBody>
-          <a:bodyPr wrap="square" lIns="18288" rIns="18288" tIns="13716" bIns="13716">
+          <a:bodyPr wrap="square" anchor="t" lIns="18288" rIns="18288" tIns="13716" bIns="13716">
             <a:noAutofit/>
           </a:bodyPr>
           <a:lstStyle/>
@@ -31299,7 +31379,7 @@
           <a:noFill/>
         </p:spPr>
         <p:txBody>
-          <a:bodyPr wrap="square" lIns="18288" rIns="18288" tIns="13716" bIns="13716">
+          <a:bodyPr wrap="square" anchor="t" lIns="18288" rIns="18288" tIns="13716" bIns="13716">
             <a:noAutofit/>
           </a:bodyPr>
           <a:lstStyle/>
@@ -31398,7 +31478,7 @@
           <a:noFill/>
         </p:spPr>
         <p:txBody>
-          <a:bodyPr wrap="square" lIns="18288" rIns="18288" tIns="13716" bIns="13716">
+          <a:bodyPr wrap="square" anchor="t" lIns="18288" rIns="18288" tIns="13716" bIns="13716">
             <a:noAutofit/>
           </a:bodyPr>
           <a:lstStyle/>
@@ -31453,7 +31533,7 @@
           <a:noFill/>
         </p:spPr>
         <p:txBody>
-          <a:bodyPr wrap="square" lIns="18288" rIns="18288" tIns="13716" bIns="13716">
+          <a:bodyPr wrap="square" anchor="t" lIns="18288" rIns="18288" tIns="13716" bIns="13716">
             <a:noAutofit/>
           </a:bodyPr>
           <a:lstStyle/>
@@ -31508,7 +31588,7 @@
           <a:noFill/>
         </p:spPr>
         <p:txBody>
-          <a:bodyPr wrap="square" lIns="18288" rIns="18288" tIns="13716" bIns="13716">
+          <a:bodyPr wrap="square" anchor="t" lIns="18288" rIns="18288" tIns="13716" bIns="13716">
             <a:noAutofit/>
           </a:bodyPr>
           <a:lstStyle/>
@@ -31563,7 +31643,7 @@
           <a:noFill/>
         </p:spPr>
         <p:txBody>
-          <a:bodyPr wrap="square" lIns="18288" rIns="18288" tIns="13716" bIns="13716">
+          <a:bodyPr wrap="square" anchor="t" lIns="18288" rIns="18288" tIns="13716" bIns="13716">
             <a:noAutofit/>
           </a:bodyPr>
           <a:lstStyle/>
@@ -31618,7 +31698,7 @@
           <a:noFill/>
         </p:spPr>
         <p:txBody>
-          <a:bodyPr wrap="square" lIns="18288" rIns="18288" tIns="13716" bIns="13716">
+          <a:bodyPr wrap="square" anchor="t" lIns="18288" rIns="18288" tIns="13716" bIns="13716">
             <a:noAutofit/>
           </a:bodyPr>
           <a:lstStyle/>
@@ -31743,7 +31823,7 @@
           <a:noFill/>
         </p:spPr>
         <p:txBody>
-          <a:bodyPr wrap="square" lIns="18288" rIns="18288" tIns="13716" bIns="13716">
+          <a:bodyPr wrap="square" anchor="t" lIns="18288" rIns="18288" tIns="13716" bIns="13716">
             <a:noAutofit/>
           </a:bodyPr>
           <a:lstStyle/>
@@ -31798,7 +31878,7 @@
           <a:noFill/>
         </p:spPr>
         <p:txBody>
-          <a:bodyPr wrap="square" lIns="18288" rIns="18288" tIns="13716" bIns="13716">
+          <a:bodyPr wrap="square" anchor="t" lIns="18288" rIns="18288" tIns="13716" bIns="13716">
             <a:noAutofit/>
           </a:bodyPr>
           <a:lstStyle/>
@@ -31853,7 +31933,7 @@
           <a:noFill/>
         </p:spPr>
         <p:txBody>
-          <a:bodyPr wrap="square" lIns="18288" rIns="18288" tIns="13716" bIns="13716">
+          <a:bodyPr wrap="square" anchor="t" lIns="18288" rIns="18288" tIns="13716" bIns="13716">
             <a:noAutofit/>
           </a:bodyPr>
           <a:lstStyle/>
@@ -31952,7 +32032,7 @@
           <a:noFill/>
         </p:spPr>
         <p:txBody>
-          <a:bodyPr wrap="square" lIns="18288" rIns="18288" tIns="13716" bIns="13716">
+          <a:bodyPr wrap="square" anchor="t" lIns="18288" rIns="18288" tIns="13716" bIns="13716">
             <a:noAutofit/>
           </a:bodyPr>
           <a:lstStyle/>
@@ -32007,7 +32087,7 @@
           <a:noFill/>
         </p:spPr>
         <p:txBody>
-          <a:bodyPr wrap="square" lIns="18288" rIns="18288" tIns="13716" bIns="13716">
+          <a:bodyPr wrap="square" anchor="t" lIns="18288" rIns="18288" tIns="13716" bIns="13716">
             <a:noAutofit/>
           </a:bodyPr>
           <a:lstStyle/>
@@ -32108,7 +32188,7 @@
           <a:noFill/>
         </p:spPr>
         <p:txBody>
-          <a:bodyPr wrap="square" lIns="18288" rIns="18288" tIns="13716" bIns="13716">
+          <a:bodyPr wrap="square" anchor="t" lIns="18288" rIns="18288" tIns="13716" bIns="13716">
             <a:noAutofit/>
           </a:bodyPr>
           <a:lstStyle/>
@@ -32163,7 +32243,7 @@
           <a:noFill/>
         </p:spPr>
         <p:txBody>
-          <a:bodyPr wrap="square" lIns="18288" rIns="18288" tIns="13716" bIns="13716">
+          <a:bodyPr wrap="square" anchor="t" lIns="18288" rIns="18288" tIns="13716" bIns="13716">
             <a:noAutofit/>
           </a:bodyPr>
           <a:lstStyle/>
@@ -32218,7 +32298,7 @@
           <a:noFill/>
         </p:spPr>
         <p:txBody>
-          <a:bodyPr wrap="square" lIns="18288" rIns="18288" tIns="13716" bIns="13716">
+          <a:bodyPr wrap="square" anchor="t" lIns="18288" rIns="18288" tIns="13716" bIns="13716">
             <a:noAutofit/>
           </a:bodyPr>
           <a:lstStyle/>
@@ -32273,7 +32353,7 @@
           <a:noFill/>
         </p:spPr>
         <p:txBody>
-          <a:bodyPr wrap="square" lIns="18288" rIns="18288" tIns="13716" bIns="13716">
+          <a:bodyPr wrap="square" anchor="t" lIns="18288" rIns="18288" tIns="13716" bIns="13716">
             <a:noAutofit/>
           </a:bodyPr>
           <a:lstStyle/>
@@ -32328,7 +32408,7 @@
           <a:noFill/>
         </p:spPr>
         <p:txBody>
-          <a:bodyPr wrap="square" lIns="18288" rIns="18288" tIns="13716" bIns="13716">
+          <a:bodyPr wrap="square" anchor="t" lIns="18288" rIns="18288" tIns="13716" bIns="13716">
             <a:noAutofit/>
           </a:bodyPr>
           <a:lstStyle/>
@@ -32429,7 +32509,7 @@
           <a:noFill/>
         </p:spPr>
         <p:txBody>
-          <a:bodyPr wrap="square" lIns="18288" rIns="18288" tIns="13716" bIns="13716">
+          <a:bodyPr wrap="square" anchor="t" lIns="18288" rIns="18288" tIns="13716" bIns="13716">
             <a:noAutofit/>
           </a:bodyPr>
           <a:lstStyle/>
@@ -32484,7 +32564,7 @@
           <a:noFill/>
         </p:spPr>
         <p:txBody>
-          <a:bodyPr wrap="square" lIns="18288" rIns="18288" tIns="13716" bIns="13716">
+          <a:bodyPr wrap="square" anchor="t" lIns="18288" rIns="18288" tIns="13716" bIns="13716">
             <a:noAutofit/>
           </a:bodyPr>
           <a:lstStyle/>
@@ -32539,7 +32619,7 @@
           <a:noFill/>
         </p:spPr>
         <p:txBody>
-          <a:bodyPr wrap="square" lIns="18288" rIns="18288" tIns="13716" bIns="13716">
+          <a:bodyPr wrap="square" anchor="t" lIns="18288" rIns="18288" tIns="13716" bIns="13716">
             <a:noAutofit/>
           </a:bodyPr>
           <a:lstStyle/>
@@ -32594,7 +32674,7 @@
           <a:noFill/>
         </p:spPr>
         <p:txBody>
-          <a:bodyPr wrap="square" lIns="18288" rIns="18288" tIns="13716" bIns="13716">
+          <a:bodyPr wrap="square" anchor="t" lIns="18288" rIns="18288" tIns="13716" bIns="13716">
             <a:noAutofit/>
           </a:bodyPr>
           <a:lstStyle/>
@@ -32649,7 +32729,7 @@
           <a:noFill/>
         </p:spPr>
         <p:txBody>
-          <a:bodyPr wrap="square" lIns="18288" rIns="18288" tIns="13716" bIns="13716">
+          <a:bodyPr wrap="square" anchor="t" lIns="18288" rIns="18288" tIns="13716" bIns="13716">
             <a:noAutofit/>
           </a:bodyPr>
           <a:lstStyle/>
